--- a/library/lectures/lec-08/rework-v5/deck/chastichnaya-sborka.pptx
+++ b/library/lectures/lec-08/rework-v5/deck/chastichnaya-sborka.pptx
@@ -503,7 +503,17 @@
           <a:lstStyle/>
           <a:p>
             <a:r>
-              <a:t>Пять предыдущих разделов были устроены одинаково, и это было сделано ради удобства чтения. Сначала описание стадии ремесла своими словами и терминами отрасли, потом классические режимы с посчитанными числами, потом разборы случаев, потом названная цена того, что переехало вправо. Такое строение хорошо для изучения и плохо для вывода. Читатель, дошедший досюда, держит в голове тринадцать разобранных случаев и несколько десятков чисел — и у него нет ни одной фразы, которой всё это можно сказать целиком.</a:t>
+              <a:t>Это единственная таблица, которая проживёт весь вечер. Она предъявляется шесть раз, и каждый</a:t>
+            </a:r>
+          </a:p>
+          <a:p>
+            <a:r>
+              <a:t>раз в ней на одну колонку больше. Сейчас в ней подписаны только строки, и этого достаточно: без</a:t>
+            </a:r>
+          </a:p>
+          <a:p>
+            <a:r>
+              <a:t>строк клетки не значат ничего, а строки задаются один раз и дальше не меняются.</a:t>
             </a:r>
           </a:p>
           <a:p>
@@ -513,7 +523,27 @@
           </a:p>
           <a:p>
             <a:r>
-              <a:t>Сборка эту фразу выдаёт, и делает здесь ровно четыре вещи.</a:t>
+              <a:t>Строк шесть, и выбраны они по типу решения, которое надо принять. Разница с делением по</a:t>
+            </a:r>
+          </a:p>
+          <a:p>
+            <a:r>
+              <a:t>инструментам существенная. Если резать по инструментам, получится список продуктов, который</a:t>
+            </a:r>
+          </a:p>
+          <a:p>
+            <a:r>
+              <a:t>устареет к следующему семестру. Если резать по типу задачи, получится сетка, в которую новый</a:t>
+            </a:r>
+          </a:p>
+          <a:p>
+            <a:r>
+              <a:t>продукт просто ложится клеткой, и это та форма знания, которая переживает смену поколений</a:t>
+            </a:r>
+          </a:p>
+          <a:p>
+            <a:r>
+              <a:t>моделей.</a:t>
             </a:r>
           </a:p>
           <a:p>
@@ -523,7 +553,27 @@
           </a:p>
           <a:p>
             <a:r>
-              <a:t>Первое. Отвечает на вопрос, заданный в конце Входа: исполнение перестало быть дефицитом — что теперь дефицит и в каких единицах за него платят. Ответ собирается по трём адресам, и за каждым стоит разобранный случай с посчитанной классикой. Отбор, права, узнавание. Каждый из трёх назван по имени, у каждого своя единица счёта, и каждый подпирается числом, которое уже прозвучало в одном из пяти разделов.</a:t>
+              <a:t>Породить первое приближение — это стадия, где нужно много дешёвых вариантов и где ни один из</a:t>
+            </a:r>
+          </a:p>
+          <a:p>
+            <a:r>
+              <a:t>них не пойдёт в продукт напрямую. Концепт, набросок облика, пробный голос, черновая анимация.</a:t>
+            </a:r>
+          </a:p>
+          <a:p>
+            <a:r>
+              <a:t>Именно сюда модель вошла первой и сильнее всего, и причина ровно в экономике попытки: вся</a:t>
+            </a:r>
+          </a:p>
+          <a:p>
+            <a:r>
+              <a:t>стадия была устроена вокруг вопроса «сколько вариантов мы можем себе позволить посмотреть,</a:t>
+            </a:r>
+          </a:p>
+          <a:p>
+            <a:r>
+              <a:t>прежде чем выбрать один», а модель изменила ту самую величину, вокруг которой стадия стояла.</a:t>
             </a:r>
           </a:p>
           <a:p>
@@ -533,7 +583,17 @@
           </a:p>
           <a:p>
             <a:r>
-              <a:t>Второе. Предъявляет измерение, которое четыре независимых площадки получили независимо друг от друга — в разных странах, разными методами, по разным модальностям. Музыкальная площадка, магазин игр, рынок аудиокниг и российский музыкальный сервис измеряли разное и пришли к одной фигуре. Такое совпадение формы результата встречается редко, и когда случается, оно надёжнее любого вывода из отдельных случаев.</a:t>
+              <a:t>Довести до производственного качества — стадия, куда всё переехало. Отбор, бракераж, доводка,</a:t>
+            </a:r>
+          </a:p>
+          <a:p>
+            <a:r>
+              <a:t>выпуск. Это новая работа: когда проба стоила денег, её делали мало и смотреть было почти нечего.</a:t>
+            </a:r>
+          </a:p>
+          <a:p>
+            <a:r>
+              <a:t>Теперь проб тысячи, и в этой клетке — ответ на вопрос, куда ушли деньги.</a:t>
             </a:r>
           </a:p>
           <a:p>
@@ -543,7 +603,27 @@
           </a:p>
           <a:p>
             <a:r>
-              <a:t>Третье. Собирает критерии, по которым инженер отказывается от генеративной модели. Все они выведены из устройства метода, разобранного в предыдущих разделах; общие соображения об осторожности в их выводе не участвовали, и именно поэтому ни один из них не закроется следующей версией модели. Это самая применимая часть вечера: критерий, сформулированный так, что его можно проверить до запуска работы — заранее, пока отказ ещё ничего не стоит.</a:t>
+              <a:t>Восстановить существующее стоит отдельной строкой, потому что это другая задача, и путают её с</a:t>
+            </a:r>
+          </a:p>
+          <a:p>
+            <a:r>
+              <a:t>порождением постоянно. Повысить разрешение архивной плёнки, вытащить голос из моноплёнки</a:t>
+            </a:r>
+          </a:p>
+          <a:p>
+            <a:r>
+              <a:t>шестидесятых, прочитать обугленный свиток — здесь модель не придумывает, а реконструирует уже</a:t>
+            </a:r>
+          </a:p>
+          <a:p>
+            <a:r>
+              <a:t>записанное. Спор вокруг восстановления идёт куда спокойнее, чем вокруг генерации, и это не</a:t>
+            </a:r>
+          </a:p>
+          <a:p>
+            <a:r>
+              <a:t>случайность: у восстановления есть оригинал, с которым можно сверить результат.</a:t>
             </a:r>
           </a:p>
           <a:p>
@@ -553,7 +633,27 @@
           </a:p>
           <a:p>
             <a:r>
-              <a:t>Четвёртое. Смотрит, куда движется сама отрасль. С одним ограничением, и произнести его надо заранее: на кадр выносится устройство рынка. Список инструментов туда не идёт. Список, собранный в октябре 2026 года, устареет к моменту, когда его прочтут; за пять дней до сдачи материала закрыли предварительный доступ к одной из ведущих видеомоделей, и это уже второй выключенный флагман за тринадцать месяцев. Устройство рынка меняется медленнее номеров версий, и прогноз из него выходит честнее.</a:t>
+              <a:t>Соблюсти точные величины — строка, которая для инженерной аудитории окажется самой важной, и</a:t>
+            </a:r>
+          </a:p>
+          <a:p>
+            <a:r>
+              <a:t>заполняться она будет преимущественно отказами. Размер, допуск, проверяемое условие — это</a:t>
+            </a:r>
+          </a:p>
+          <a:p>
+            <a:r>
+              <a:t>вопросы, на которые изображение объекта не отвечает, потому что внутри изображения нет ни</a:t>
+            </a:r>
+          </a:p>
+          <a:p>
+            <a:r>
+              <a:t>единиц измерения, ни дерева построения. Клетка, в которой написано «модель — не тот</a:t>
+            </a:r>
+          </a:p>
+          <a:p>
+            <a:r>
+              <a:t>инструмент», — полноценный результат, а не пробел, и таких клеток в карте будет несколько.</a:t>
             </a:r>
           </a:p>
           <a:p>
@@ -563,7 +663,22 @@
           </a:p>
           <a:p>
             <a:r>
-              <a:t>Чего в разделе нет — тоже стоит сказать. Нет ни одного нового разобранного случая, и это сознательное ограничение. Раздел, который вводит свежий материал на последних минутах, читается шестым по счёту и сборкой быть перестаёт: вместо того чтобы завязать узел, он распускает ещё одну нить. Всё, что прозвучит дальше, уже было показано — меняется только то, что теперь оно стоит рядом друг с другом.</a:t>
+              <a:t>Уложиться в бюджет реального времени — строка про срок кадра, а не про срок задачи. Между</a:t>
+            </a:r>
+          </a:p>
+          <a:p>
+            <a:r>
+              <a:t>«картинка за двадцать секунд» и «кадр за шестнадцать миллисекунд» лежит не разница в скорости,</a:t>
+            </a:r>
+          </a:p>
+          <a:p>
+            <a:r>
+              <a:t>а разница в классе инженерной задачи, и это станет видно там, где речь пойдёт о трёхмерной</a:t>
+            </a:r>
+          </a:p>
+          <a:p>
+            <a:r>
+              <a:t>сцене.</a:t>
             </a:r>
           </a:p>
           <a:p>
@@ -573,7 +688,22 @@
           </a:p>
           <a:p>
             <a:r>
-              <a:t>И последнее, что надо держать в голове, входя в раздел. Тринадцать разобранных случаев распадаются на три неравные части, и в конце вечера эти части будут названы числом. В семи случаях выигрыш посчитан от классического режима — то есть обе стороны измерены в одной и той же единице, и видно, сколько стоило без модели и сколько стало с ней. В трёх классический режим назван, но числа у него нет, и об этом сказано вслух на самом кадре разбора. В трёх классического режима не существует вовсе, и это свойство самой задачи: работу, которую не делали никогда, не с чем сравнивать.</a:t>
+              <a:t>Ответить «кто отвечает» — строка про происхождение и права. Откуда взялась эта деталь, можно ли</a:t>
+            </a:r>
+          </a:p>
+          <a:p>
+            <a:r>
+              <a:t>это выпускать, кому принадлежит результат, чем подтверждается, что это снято, а не собрано. По</a:t>
+            </a:r>
+          </a:p>
+          <a:p>
+            <a:r>
+              <a:t>этой строке у неподвижного изображения будет пусто — и пусто по устройству метода, а не потому,</a:t>
+            </a:r>
+          </a:p>
+          <a:p>
+            <a:r>
+              <a:t>что чего-то не нашли.</a:t>
             </a:r>
           </a:p>
           <a:p>
@@ -583,7 +713,77 @@
           </a:p>
           <a:p>
             <a:r>
-              <a:t>Один из семи стоит на границе, и прятать это не нужно — наоборот, назвать. Дубляж: первый его классический режим, живой диктор по 50–450 долларов за готовую минуту, измерен ровно в той единице, в которой считается синтез, и потому выигрыш там честный; второй режим, субтитры, назван и своего тарифа за минуту не имеет. По форме разбора эта строка проходит по графе «второй режим без числа»; по вопросу «от чего посчитан выигрыш» она попадает к посчитанным. Оба утверждения верны одновременно, и именно поэтому счёт показывается целиком, а не выдаётся готовым числом. Сборка готовит почву для этого счёта, а само число прозвучит на закрытии.</a:t>
+              <a:t>Колонок будет пять, и добавляются они по одной в конце каждого раздела, в порядке роста цены</a:t>
+            </a:r>
+          </a:p>
+          <a:p>
+            <a:r>
+              <a:t>единицы выхода: изображение, звук, видео, трёхмерное, распознавание. Шестой колонки нет</a:t>
+            </a:r>
+          </a:p>
+          <a:p>
+            <a:r>
+              <a:t>намеренно: сборка — не модальность, она читает готовую карту, а не дописывает её.</a:t>
+            </a:r>
+          </a:p>
+          <a:p>
+            <a:r>
+              <a:t>Распознавание стоит в ряду особняком и по другой причине: там модель решает обратную задачу —</a:t>
+            </a:r>
+          </a:p>
+          <a:p>
+            <a:r>
+              <a:t>читает, а не рисует, — и это та же архитектура внимания, развёрнутая в другую сторону.</a:t>
+            </a:r>
+          </a:p>
+          <a:p>
+            <a:r>
+              <a:t/>
+            </a:r>
+          </a:p>
+          <a:p>
+            <a:r>
+              <a:t>Под сеткой пойдёт отдельная полоса — адрес платежа. Каждый разбор называет, куда уходит</a:t>
+            </a:r>
+          </a:p>
+          <a:p>
+            <a:r>
+              <a:t>заплаченное: в отбор, в права или в узнавание, — и к концу вечера станет видно, что адреса</a:t>
+            </a:r>
+          </a:p>
+          <a:p>
+            <a:r>
+              <a:t>распределены по модальностям неравномерно, а эта неравномерность сама по себе содержательна.</a:t>
+            </a:r>
+          </a:p>
+          <a:p>
+            <a:r>
+              <a:t/>
+            </a:r>
+          </a:p>
+          <a:p>
+            <a:r>
+              <a:t>Последнее про эту карту, и оно про честность. К концу вечера часть клеток останется пустой.</a:t>
+            </a:r>
+          </a:p>
+          <a:p>
+            <a:r>
+              <a:t>Каждая пустая клетка будет названа содержательно: либо «метод сюда не годится, и вот причина»,</a:t>
+            </a:r>
+          </a:p>
+          <a:p>
+            <a:r>
+              <a:t>либо «приём работает, но случая с посчитанными обеими сторонами в открытых источниках найти не</a:t>
+            </a:r>
+          </a:p>
+          <a:p>
+            <a:r>
+              <a:t>удалось». Оговорки «наверняка что-то пропущено» на этой карте не будет — пробел называется</a:t>
+            </a:r>
+          </a:p>
+          <a:p>
+            <a:r>
+              <a:t>своим именем или не называется вовсе.</a:t>
             </a:r>
           </a:p>
         </p:txBody>
@@ -653,7 +853,7 @@
           <a:lstStyle/>
           <a:p>
             <a:r>
-              <a:t>И само наблюдение: работы вышли заметно более похожими друг на друга. Механизм понятен из устройства — модель обучена на том, что встречалось чаще, и при равных условиях выдаёт то, что встречалось чаще. Семьдесят тысяч вариантов, полученных одним способом из одной модели, менее разнообразны, чем семьдесят вариантов, полученных семьюдесятью разными людьми. Перебор расширил количество проб и сузил их разброс.</a:t>
+              <a:t>Накопительная карта после трёх разделов заполнена на три колонки из пяти. Строка «породить первое приближение» растёт слева направо на порядок при каждом переходе, и карта показывает ровно это: чем дороже единица выхода, тем больше попыток приходится просеивать, чтобы получить одну годную. Дешевизна попытки и дороговизна выбора растут вместе. Под сеткой идёт полоса адреса платежа: у изображения это отбор и права, у звука — права и узнавание, у видео — отбор.</a:t>
             </a:r>
           </a:p>
           <a:p>
@@ -663,7 +863,7 @@
           </a:p>
           <a:p>
             <a:r>
-              <a:t>Но здесь начинается то, ради чего кадр стоит в Сборке, и это условие важнее самого эффекта. Сужение авторы наблюдали в командах, где человек отдавал работу модели целиком и общался с ней в межличностном стиле, как с собеседником. При задачно-ориентированном взаимодействии — человек ставит задачу, разбирает результат, ставит следующую — тот же опыт тем же счётом зафиксировал более высокую производительность, более высокое качество по всем измерениям сразу и отсутствие обрушения разнообразия. Обе половины измерены на одном и том же материале.</a:t>
+              <a:t>Вывод раздела, в трёх частях. Где польза: производство отдельного плана подешевело на три порядка, и это посчитано от классического режима трижды — микродрама с миллиона юаней до 50–100 тысяч, рекламный ролик с сорока тысяч долларов до двух тысяч, производственный цикл крупной кампании с года до месяца. Ни в одном из трёх случаев выигрыш не считался от нуля. Где границы: между кадрами нет объекта, который «тот же»; физика выучена как корреляция, и лучшая модель даёт 29,5 процента от воспроизводимости самой реальности; длина и разрешение покупаются нелинейно — втрое по разрешению стоит сорокакратно по времени обучения. Какая нагрузка идёт дальше: отбор — 400 генераций на 15 склеек, 300 к одному, сотни планов на пару десятков; и устойчивость инструмента — два флагмана выключены за тринадцать месяцев, и фильм, построенный на одном из них, сдвинулся на год.</a:t>
             </a:r>
           </a:p>
           <a:p>
@@ -673,7 +873,7 @@
           </a:p>
           <a:p>
             <a:r>
-              <a:t>Разложим два режима по именам, потому что различает их не инструмент и не задача, а то, как человек себя в этой паре ведёт.</a:t>
+              <a:t>Технический вывод на материале раздела: главный рычаг — токенизатор. Коэффициент сжатия автокодировщика, поднятый до 32, сократил число токенов с 76 до 19 тысяч и опустил стоимость обучения коммерческой видеомодели до двухсот тысяч долларов; размер модели при этом остался прежним.</a:t>
             </a:r>
           </a:p>
           <a:p>
@@ -683,7 +883,7 @@
           </a:p>
           <a:p>
             <a:r>
-              <a:t>Режим первый — делегирование. Человек отдаёт работу модели целиком и говорит с ней как с собеседником: формулирует, получает, принимает. Здесь и наступает сужение разброса: работы выходят заметно более похожими друг на друга, потому что все они приходят из одного распределения, сдвинутого к середине ожидаемого. Семьдесят тысяч вариантов, порождённых одной моделью, менее разнообразны, чем семьдесят вариантов от семидесяти разных людей, — и это измеренное свойство. Там, где ценность работы состоит именно в отклонении от центра ожиданий, этот режим её уничтожает.</a:t>
+              <a:t>Как читать карту вслух. Первая строка отвечает на вопрос «можно ли этим вообще начать работу» и по всем трём заполненным колонкам отвечает «да, и дёшево». Вторая отвечает на вопрос «можно ли этим закончить» и по всем трём колонкам упирается в ручную работу человека: правку, отбор, склейку. Третья — единственная, где у модели есть честная метрика и верхняя граница, вычисленная при знании ответа. Три нижние строки заполнены словом «нет» или «неприменимо», и в каждой клетке названа причина отказа, а не одно голое слово «нет». Пустых клеток в заполненных колонках нет, и это обязательное свойство карты: там, где измеренного случая у нас не нашлось, сказано, что именно известно и чего не хватает.</a:t>
             </a:r>
           </a:p>
           <a:p>
@@ -693,7 +893,7 @@
           </a:p>
           <a:p>
             <a:r>
-              <a:t>Режим второй — задачно-ориентированный. Человек ставит задачу, разбирает результат, ставит следующую. Решение о том, что считать годным, остаётся у него, и распределение формируется его отбором, а не распределением модели. В этом режиме обрушения разнообразия в опыте не наблюдается вовсе — и при этом выше и производительность, и качество, по всем измерениям сразу.</a:t>
+              <a:t>Две колонки ещё впереди — трёхмерная сцена и распознавание. Строки при этом не изменятся ни разу: карта накапливается колонками, и переписывать их не придётся. Это и есть её польза как инструмента — к концу вечера шесть типов задач окажутся проверены на пяти модальностях одним и тем же вопросом, и сравнивать модальности между собой можно будет построчно, не держа в голове пять разных рассказов.</a:t>
             </a:r>
           </a:p>
           <a:p>
@@ -703,7 +903,7 @@
           </a:p>
           <a:p>
             <a:r>
-              <a:t>Это и есть практический вывод кадра, и он редкий по форме: у эффекта есть выключатель, и выключатель в руках человека. Не у поставщика модели, не у регулятора, не у следующей версии — у того, кто сидит перед экраном и решает, отдать ли работу целиком или вести её шагами. Условие здесь важнее самого эффекта: сужение разброса — не свойство технологии, а свойство одного из двух способов ею пользоваться.</a:t>
+              <a:t>Отдельно стоит сказать, чего карта не делает. Она не сравнивает модальности по качеству и не говорит, какая из них «лучше»: клетка «0,034–0,05 доллара за изображение» и клетка «цена выпуска ниже в 10–20 раз» измерены в разных единицах и рядом стоят только потому, что отвечают на один и тот же вопрос. Карта отвечает на вопрос «что здесь вообще можно поручить модели», а не на вопрос «где она сильнее». Второй вопрос в такой сетке не решается, и попытка вычитать из неё рейтинг модальностей — самая вероятная ошибка чтения.</a:t>
             </a:r>
           </a:p>
           <a:p>
@@ -713,17 +913,7 @@
           </a:p>
           <a:p>
             <a:r>
-              <a:t>Для практики из этого следует проверяемое требование к процессу, а не к инструменту. Если вы вводите обученную модель туда, где ценится несходство результатов — в проектирование вариантов, в рекламные тексты, в поиск технических решений, — запишите в регламент, что человек ставит задачу и разбирает результат, а не принимает выданное целиком. Это не вопрос вкуса и не дисциплина ради дисциплины: разница между двумя режимами измерена на двух тысячах с лишним участников и одиннадцати тысячах объявлений, и проверена поведением настоящей аудитории, а не судейскими оценками.</a:t>
-            </a:r>
-          </a:p>
-          <a:p>
-            <a:r>
-              <a:t/>
-            </a:r>
-          </a:p>
-          <a:p>
-            <a:r>
-              <a:t>И вот чем этот опыт отличается от большинства: качество здесь мерили не судейскими оценками, а поведением настоящей аудитории на реальных показах — одиннадцать тысяч двадцать четыре объявления, две тысячи двести тридцать четыре участника. Судейская оценка измеряет, что нравится судье; показ измеряет, что сработало. Для вывода о разнообразии это принципиально: судья как раз склонен выше оценивать работу, сдвинутую к центру ожиданий.</a:t>
+              <a:t>Пользоваться картой за пределами лекции проще всего так: взять свою задачу, определить, в какую из шести строк она попадает, и прочитать клетку своей модальности. Если в клетке число — есть измеренный случай, и можно оттолкнуться от него. Если «нет» с причиной — причина названа, и она обычно сильнее любой настройки. Если «неприменимо» — вопрос к этой стадии не задаётся, и это тоже ответ.</a:t>
             </a:r>
           </a:p>
         </p:txBody>
@@ -3761,31 +3951,40 @@
       </p:sp>
       <p:sp>
         <p:nvSpPr>
-          <p:cNvPr id="3" name="Rectangle 2"/>
-          <p:cNvSpPr/>
-          <p:nvPr/>
-        </p:nvSpPr>
-        <p:spPr>
-          <a:xfrm>
-            <a:off x="0" y="0"/>
-            <a:ext cx="155448" cy="6858000"/>
-          </a:xfrm>
-          <a:prstGeom prst="rect">
-            <a:avLst/>
-          </a:prstGeom>
-          <a:solidFill>
-            <a:srgbClr val="065A82"/>
-          </a:solidFill>
-          <a:ln>
-            <a:noFill/>
-          </a:ln>
-          <a:effectLst/>
-        </p:spPr>
-        <p:txBody>
-          <a:bodyPr rtlCol="0" anchor="ctr"/>
-          <a:lstStyle/>
-          <a:p>
-            <a:pPr algn="ctr"/>
+          <p:cNvPr id="3" name="TextBox 2"/>
+          <p:cNvSpPr txBox="1"/>
+          <p:nvPr/>
+        </p:nvSpPr>
+        <p:spPr>
+          <a:xfrm>
+            <a:off x="502920" y="365760"/>
+            <a:ext cx="11185855" cy="841248"/>
+          </a:xfrm>
+          <a:prstGeom prst="rect">
+            <a:avLst/>
+          </a:prstGeom>
+          <a:noFill/>
+        </p:spPr>
+        <p:txBody>
+          <a:bodyPr wrap="square" lIns="0" rIns="0" tIns="0" bIns="0" anchor="t">
+            <a:spAutoFit/>
+          </a:bodyPr>
+          <a:lstStyle/>
+          <a:p>
+            <a:pPr algn="l">
+              <a:lnSpc>
+                <a:spcPct val="108000"/>
+              </a:lnSpc>
+            </a:pPr>
+            <a:r>
+              <a:rPr sz="2700" b="1" i="0">
+                <a:solidFill>
+                  <a:srgbClr val="21295C"/>
+                </a:solidFill>
+                <a:latin typeface="Arial"/>
+              </a:rPr>
+              <a:t>Карта вечера: шесть типов задачи, по колонке за раздел</a:t>
+            </a:r>
           </a:p>
         </p:txBody>
       </p:sp>
@@ -3797,12 +3996,12 @@
         </p:nvSpPr>
         <p:spPr>
           <a:xfrm>
-            <a:off x="8065986" y="914400"/>
-            <a:ext cx="3622788" cy="4937760"/>
+            <a:off x="374904" y="1243584"/>
+            <a:ext cx="11441887" cy="485979"/>
           </a:xfrm>
           <a:prstGeom prst="roundRect">
             <a:avLst>
-              <a:gd name="adj" fmla="val 8413"/>
+              <a:gd name="adj" fmla="val 25000"/>
             </a:avLst>
           </a:prstGeom>
           <a:solidFill>
@@ -3823,40 +4022,16 @@
           </a:p>
         </p:txBody>
       </p:sp>
-      <p:pic>
-        <p:nvPicPr>
-          <p:cNvPr id="5" name="Picture 4" descr="s88-contact-sheet.jpg"/>
-          <p:cNvPicPr>
-            <a:picLocks noChangeAspect="1"/>
-          </p:cNvPicPr>
-          <p:nvPr/>
-        </p:nvPicPr>
-        <p:blipFill>
-          <a:blip r:embed="rId2"/>
-          <a:stretch>
-            <a:fillRect/>
-          </a:stretch>
-        </p:blipFill>
-        <p:spPr>
-          <a:xfrm>
-            <a:off x="8203146" y="1051560"/>
-            <a:ext cx="3348468" cy="4663440"/>
-          </a:xfrm>
-          <a:prstGeom prst="rect">
-            <a:avLst/>
-          </a:prstGeom>
-        </p:spPr>
-      </p:pic>
-      <p:sp>
-        <p:nvSpPr>
-          <p:cNvPr id="6" name="TextBox 5"/>
+      <p:sp>
+        <p:nvSpPr>
+          <p:cNvPr id="5" name="TextBox 4"/>
           <p:cNvSpPr txBox="1"/>
           <p:nvPr/>
         </p:nvSpPr>
         <p:spPr>
           <a:xfrm>
-            <a:off x="704088" y="960120"/>
-            <a:ext cx="5943600" cy="518678"/>
+            <a:off x="539496" y="1335024"/>
+            <a:ext cx="11112703" cy="394539"/>
           </a:xfrm>
           <a:prstGeom prst="rect">
             <a:avLst/>
@@ -3871,37 +4046,37 @@
           <a:p>
             <a:pPr algn="l">
               <a:lnSpc>
-                <a:spcPct val="110000"/>
+                <a:spcPct val="126000"/>
               </a:lnSpc>
             </a:pPr>
             <a:r>
-              <a:rPr sz="3000" b="1" i="0">
+              <a:rPr sz="1500" b="1" i="0">
                 <a:solidFill>
                   <a:srgbClr val="21295C"/>
                 </a:solidFill>
                 <a:latin typeface="Arial"/>
               </a:rPr>
-              <a:t>Раздел 6. Сборка</a:t>
-            </a:r>
-          </a:p>
-        </p:txBody>
-      </p:sp>
-      <p:sp>
-        <p:nvSpPr>
-          <p:cNvPr id="7" name="Rectangle 6"/>
+              <a:t>Строки заданы сразу. Колонка добавляется в конце каждого раздела.</a:t>
+            </a:r>
+          </a:p>
+        </p:txBody>
+      </p:sp>
+      <p:sp>
+        <p:nvSpPr>
+          <p:cNvPr id="6" name="Rectangle 5"/>
           <p:cNvSpPr/>
           <p:nvPr/>
         </p:nvSpPr>
         <p:spPr>
           <a:xfrm>
-            <a:off x="704088" y="1570238"/>
-            <a:ext cx="1188720" cy="59436"/>
-          </a:xfrm>
-          <a:prstGeom prst="rect">
-            <a:avLst/>
-          </a:prstGeom>
-          <a:solidFill>
-            <a:srgbClr val="F0AB00"/>
+            <a:off x="502920" y="1839291"/>
+            <a:ext cx="2788920" cy="305623"/>
+          </a:xfrm>
+          <a:prstGeom prst="rect">
+            <a:avLst/>
+          </a:prstGeom>
+          <a:solidFill>
+            <a:srgbClr val="21295C"/>
           </a:solidFill>
           <a:ln>
             <a:noFill/>
@@ -3918,14 +4093,14 @@
       </p:sp>
       <p:sp>
         <p:nvSpPr>
-          <p:cNvPr id="8" name="TextBox 7"/>
+          <p:cNvPr id="7" name="TextBox 6"/>
           <p:cNvSpPr txBox="1"/>
           <p:nvPr/>
         </p:nvSpPr>
         <p:spPr>
           <a:xfrm>
-            <a:off x="704088" y="1844558"/>
-            <a:ext cx="5742432" cy="1244938"/>
+            <a:off x="566928" y="1903299"/>
+            <a:ext cx="2660903" cy="177607"/>
           </a:xfrm>
           <a:prstGeom prst="rect">
             <a:avLst/>
@@ -3940,40 +4115,918 @@
           <a:p>
             <a:pPr algn="l">
               <a:lnSpc>
-                <a:spcPct val="124000"/>
+                <a:spcPct val="113000"/>
               </a:lnSpc>
             </a:pPr>
             <a:r>
-              <a:rPr sz="1550" b="1" i="0">
+              <a:rPr sz="1000" b="1" i="0">
+                <a:solidFill>
+                  <a:srgbClr val="FFFFFF"/>
+                </a:solidFill>
+                <a:latin typeface="Arial"/>
+              </a:rPr>
+              <a:t>Тип задачи</a:t>
+            </a:r>
+          </a:p>
+        </p:txBody>
+      </p:sp>
+      <p:sp>
+        <p:nvSpPr>
+          <p:cNvPr id="8" name="Rectangle 7"/>
+          <p:cNvSpPr/>
+          <p:nvPr/>
+        </p:nvSpPr>
+        <p:spPr>
+          <a:xfrm>
+            <a:off x="3291839" y="1839291"/>
+            <a:ext cx="1679387" cy="305623"/>
+          </a:xfrm>
+          <a:prstGeom prst="rect">
+            <a:avLst/>
+          </a:prstGeom>
+          <a:solidFill>
+            <a:srgbClr val="F4F7FA"/>
+          </a:solidFill>
+          <a:ln w="12700">
+            <a:solidFill>
+              <a:srgbClr val="D9E2EC"/>
+            </a:solidFill>
+          </a:ln>
+          <a:effectLst/>
+        </p:spPr>
+        <p:txBody>
+          <a:bodyPr rtlCol="0" anchor="ctr"/>
+          <a:lstStyle/>
+          <a:p>
+            <a:pPr algn="ctr"/>
+          </a:p>
+        </p:txBody>
+      </p:sp>
+      <p:sp>
+        <p:nvSpPr>
+          <p:cNvPr id="9" name="TextBox 8"/>
+          <p:cNvSpPr txBox="1"/>
+          <p:nvPr/>
+        </p:nvSpPr>
+        <p:spPr>
+          <a:xfrm>
+            <a:off x="3355847" y="1903299"/>
+            <a:ext cx="1551371" cy="177607"/>
+          </a:xfrm>
+          <a:prstGeom prst="rect">
+            <a:avLst/>
+          </a:prstGeom>
+          <a:noFill/>
+        </p:spPr>
+        <p:txBody>
+          <a:bodyPr wrap="square" lIns="0" rIns="0" tIns="0" bIns="0" anchor="t">
+            <a:spAutoFit/>
+          </a:bodyPr>
+          <a:lstStyle/>
+          <a:p>
+            <a:pPr algn="l">
+              <a:lnSpc>
+                <a:spcPct val="113000"/>
+              </a:lnSpc>
+            </a:pPr>
+            <a:r>
+              <a:rPr sz="1000" b="0" i="1">
+                <a:solidFill>
+                  <a:srgbClr val="1C7293"/>
+                </a:solidFill>
+                <a:latin typeface="Arial"/>
+              </a:rPr>
+              <a:t>Изображение</a:t>
+            </a:r>
+          </a:p>
+        </p:txBody>
+      </p:sp>
+      <p:sp>
+        <p:nvSpPr>
+          <p:cNvPr id="10" name="Rectangle 9"/>
+          <p:cNvSpPr/>
+          <p:nvPr/>
+        </p:nvSpPr>
+        <p:spPr>
+          <a:xfrm>
+            <a:off x="4971227" y="1839291"/>
+            <a:ext cx="1679387" cy="305623"/>
+          </a:xfrm>
+          <a:prstGeom prst="rect">
+            <a:avLst/>
+          </a:prstGeom>
+          <a:solidFill>
+            <a:srgbClr val="F4F7FA"/>
+          </a:solidFill>
+          <a:ln w="12700">
+            <a:solidFill>
+              <a:srgbClr val="D9E2EC"/>
+            </a:solidFill>
+          </a:ln>
+          <a:effectLst/>
+        </p:spPr>
+        <p:txBody>
+          <a:bodyPr rtlCol="0" anchor="ctr"/>
+          <a:lstStyle/>
+          <a:p>
+            <a:pPr algn="ctr"/>
+          </a:p>
+        </p:txBody>
+      </p:sp>
+      <p:sp>
+        <p:nvSpPr>
+          <p:cNvPr id="11" name="TextBox 10"/>
+          <p:cNvSpPr txBox="1"/>
+          <p:nvPr/>
+        </p:nvSpPr>
+        <p:spPr>
+          <a:xfrm>
+            <a:off x="5035235" y="1903299"/>
+            <a:ext cx="1551371" cy="177607"/>
+          </a:xfrm>
+          <a:prstGeom prst="rect">
+            <a:avLst/>
+          </a:prstGeom>
+          <a:noFill/>
+        </p:spPr>
+        <p:txBody>
+          <a:bodyPr wrap="square" lIns="0" rIns="0" tIns="0" bIns="0" anchor="t">
+            <a:spAutoFit/>
+          </a:bodyPr>
+          <a:lstStyle/>
+          <a:p>
+            <a:pPr algn="l">
+              <a:lnSpc>
+                <a:spcPct val="113000"/>
+              </a:lnSpc>
+            </a:pPr>
+            <a:r>
+              <a:rPr sz="1000" b="0" i="1">
+                <a:solidFill>
+                  <a:srgbClr val="1C7293"/>
+                </a:solidFill>
+                <a:latin typeface="Arial"/>
+              </a:rPr>
+              <a:t>Звук</a:t>
+            </a:r>
+          </a:p>
+        </p:txBody>
+      </p:sp>
+      <p:sp>
+        <p:nvSpPr>
+          <p:cNvPr id="12" name="Rectangle 11"/>
+          <p:cNvSpPr/>
+          <p:nvPr/>
+        </p:nvSpPr>
+        <p:spPr>
+          <a:xfrm>
+            <a:off x="6650614" y="1839291"/>
+            <a:ext cx="1679387" cy="305623"/>
+          </a:xfrm>
+          <a:prstGeom prst="rect">
+            <a:avLst/>
+          </a:prstGeom>
+          <a:solidFill>
+            <a:srgbClr val="F4F7FA"/>
+          </a:solidFill>
+          <a:ln w="12700">
+            <a:solidFill>
+              <a:srgbClr val="D9E2EC"/>
+            </a:solidFill>
+          </a:ln>
+          <a:effectLst/>
+        </p:spPr>
+        <p:txBody>
+          <a:bodyPr rtlCol="0" anchor="ctr"/>
+          <a:lstStyle/>
+          <a:p>
+            <a:pPr algn="ctr"/>
+          </a:p>
+        </p:txBody>
+      </p:sp>
+      <p:sp>
+        <p:nvSpPr>
+          <p:cNvPr id="13" name="TextBox 12"/>
+          <p:cNvSpPr txBox="1"/>
+          <p:nvPr/>
+        </p:nvSpPr>
+        <p:spPr>
+          <a:xfrm>
+            <a:off x="6714622" y="1903299"/>
+            <a:ext cx="1551371" cy="177607"/>
+          </a:xfrm>
+          <a:prstGeom prst="rect">
+            <a:avLst/>
+          </a:prstGeom>
+          <a:noFill/>
+        </p:spPr>
+        <p:txBody>
+          <a:bodyPr wrap="square" lIns="0" rIns="0" tIns="0" bIns="0" anchor="t">
+            <a:spAutoFit/>
+          </a:bodyPr>
+          <a:lstStyle/>
+          <a:p>
+            <a:pPr algn="l">
+              <a:lnSpc>
+                <a:spcPct val="113000"/>
+              </a:lnSpc>
+            </a:pPr>
+            <a:r>
+              <a:rPr sz="1000" b="0" i="1">
+                <a:solidFill>
+                  <a:srgbClr val="1C7293"/>
+                </a:solidFill>
+                <a:latin typeface="Arial"/>
+              </a:rPr>
+              <a:t>Видео</a:t>
+            </a:r>
+          </a:p>
+        </p:txBody>
+      </p:sp>
+      <p:sp>
+        <p:nvSpPr>
+          <p:cNvPr id="14" name="Rectangle 13"/>
+          <p:cNvSpPr/>
+          <p:nvPr/>
+        </p:nvSpPr>
+        <p:spPr>
+          <a:xfrm>
+            <a:off x="8330001" y="1839291"/>
+            <a:ext cx="1679387" cy="305623"/>
+          </a:xfrm>
+          <a:prstGeom prst="rect">
+            <a:avLst/>
+          </a:prstGeom>
+          <a:solidFill>
+            <a:srgbClr val="F4F7FA"/>
+          </a:solidFill>
+          <a:ln w="12700">
+            <a:solidFill>
+              <a:srgbClr val="D9E2EC"/>
+            </a:solidFill>
+          </a:ln>
+          <a:effectLst/>
+        </p:spPr>
+        <p:txBody>
+          <a:bodyPr rtlCol="0" anchor="ctr"/>
+          <a:lstStyle/>
+          <a:p>
+            <a:pPr algn="ctr"/>
+          </a:p>
+        </p:txBody>
+      </p:sp>
+      <p:sp>
+        <p:nvSpPr>
+          <p:cNvPr id="15" name="TextBox 14"/>
+          <p:cNvSpPr txBox="1"/>
+          <p:nvPr/>
+        </p:nvSpPr>
+        <p:spPr>
+          <a:xfrm>
+            <a:off x="8394009" y="1903299"/>
+            <a:ext cx="1551371" cy="177607"/>
+          </a:xfrm>
+          <a:prstGeom prst="rect">
+            <a:avLst/>
+          </a:prstGeom>
+          <a:noFill/>
+        </p:spPr>
+        <p:txBody>
+          <a:bodyPr wrap="square" lIns="0" rIns="0" tIns="0" bIns="0" anchor="t">
+            <a:spAutoFit/>
+          </a:bodyPr>
+          <a:lstStyle/>
+          <a:p>
+            <a:pPr algn="l">
+              <a:lnSpc>
+                <a:spcPct val="113000"/>
+              </a:lnSpc>
+            </a:pPr>
+            <a:r>
+              <a:rPr sz="1000" b="0" i="1">
+                <a:solidFill>
+                  <a:srgbClr val="1C7293"/>
+                </a:solidFill>
+                <a:latin typeface="Arial"/>
+              </a:rPr>
+              <a:t>Трёхмерное</a:t>
+            </a:r>
+          </a:p>
+        </p:txBody>
+      </p:sp>
+      <p:sp>
+        <p:nvSpPr>
+          <p:cNvPr id="16" name="Rectangle 15"/>
+          <p:cNvSpPr/>
+          <p:nvPr/>
+        </p:nvSpPr>
+        <p:spPr>
+          <a:xfrm>
+            <a:off x="10009388" y="1839291"/>
+            <a:ext cx="1679387" cy="305623"/>
+          </a:xfrm>
+          <a:prstGeom prst="rect">
+            <a:avLst/>
+          </a:prstGeom>
+          <a:solidFill>
+            <a:srgbClr val="F4F7FA"/>
+          </a:solidFill>
+          <a:ln w="12700">
+            <a:solidFill>
+              <a:srgbClr val="D9E2EC"/>
+            </a:solidFill>
+          </a:ln>
+          <a:effectLst/>
+        </p:spPr>
+        <p:txBody>
+          <a:bodyPr rtlCol="0" anchor="ctr"/>
+          <a:lstStyle/>
+          <a:p>
+            <a:pPr algn="ctr"/>
+          </a:p>
+        </p:txBody>
+      </p:sp>
+      <p:sp>
+        <p:nvSpPr>
+          <p:cNvPr id="17" name="TextBox 16"/>
+          <p:cNvSpPr txBox="1"/>
+          <p:nvPr/>
+        </p:nvSpPr>
+        <p:spPr>
+          <a:xfrm>
+            <a:off x="10073396" y="1903299"/>
+            <a:ext cx="1551371" cy="177607"/>
+          </a:xfrm>
+          <a:prstGeom prst="rect">
+            <a:avLst/>
+          </a:prstGeom>
+          <a:noFill/>
+        </p:spPr>
+        <p:txBody>
+          <a:bodyPr wrap="square" lIns="0" rIns="0" tIns="0" bIns="0" anchor="t">
+            <a:spAutoFit/>
+          </a:bodyPr>
+          <a:lstStyle/>
+          <a:p>
+            <a:pPr algn="l">
+              <a:lnSpc>
+                <a:spcPct val="113000"/>
+              </a:lnSpc>
+            </a:pPr>
+            <a:r>
+              <a:rPr sz="1000" b="0" i="1">
+                <a:solidFill>
+                  <a:srgbClr val="1C7293"/>
+                </a:solidFill>
+                <a:latin typeface="Arial"/>
+              </a:rPr>
+              <a:t>Распознавание</a:t>
+            </a:r>
+          </a:p>
+        </p:txBody>
+      </p:sp>
+      <p:sp>
+        <p:nvSpPr>
+          <p:cNvPr id="18" name="Rectangle 17"/>
+          <p:cNvSpPr/>
+          <p:nvPr/>
+        </p:nvSpPr>
+        <p:spPr>
+          <a:xfrm>
+            <a:off x="502920" y="2144915"/>
+            <a:ext cx="2788920" cy="652750"/>
+          </a:xfrm>
+          <a:prstGeom prst="rect">
+            <a:avLst/>
+          </a:prstGeom>
+          <a:solidFill>
+            <a:srgbClr val="FFFFFF"/>
+          </a:solidFill>
+          <a:ln w="9525">
+            <a:solidFill>
+              <a:srgbClr val="D9E2EC"/>
+            </a:solidFill>
+          </a:ln>
+          <a:effectLst/>
+        </p:spPr>
+        <p:txBody>
+          <a:bodyPr rtlCol="0" anchor="ctr"/>
+          <a:lstStyle/>
+          <a:p>
+            <a:pPr algn="ctr"/>
+          </a:p>
+        </p:txBody>
+      </p:sp>
+      <p:sp>
+        <p:nvSpPr>
+          <p:cNvPr id="19" name="TextBox 18"/>
+          <p:cNvSpPr txBox="1"/>
+          <p:nvPr/>
+        </p:nvSpPr>
+        <p:spPr>
+          <a:xfrm>
+            <a:off x="566928" y="2208923"/>
+            <a:ext cx="2660903" cy="524734"/>
+          </a:xfrm>
+          <a:prstGeom prst="rect">
+            <a:avLst/>
+          </a:prstGeom>
+          <a:noFill/>
+        </p:spPr>
+        <p:txBody>
+          <a:bodyPr wrap="square" lIns="0" rIns="0" tIns="0" bIns="0" anchor="t">
+            <a:spAutoFit/>
+          </a:bodyPr>
+          <a:lstStyle/>
+          <a:p>
+            <a:pPr algn="l">
+              <a:lnSpc>
+                <a:spcPct val="113000"/>
+              </a:lnSpc>
+            </a:pPr>
+            <a:r>
+              <a:rPr sz="1100" b="1" i="0">
                 <a:solidFill>
                   <a:srgbClr val="21295C"/>
                 </a:solidFill>
                 <a:latin typeface="Arial"/>
               </a:rPr>
-              <a:t>Пять разделов шли по модальностям и дали тринадцать разобранных случаев. Здесь не прибавится ни одного нового</a:t>
-            </a:r>
-            <a:r>
-              <a:rPr sz="1550" b="0" i="0">
+              <a:t>Породить первое приближение</a:t>
+            </a:r>
+          </a:p>
+          <a:p>
+            <a:pPr algn="l">
+              <a:lnSpc>
+                <a:spcPct val="113000"/>
+              </a:lnSpc>
+              <a:spcBef>
+                <a:spcPts val="200"/>
+              </a:spcBef>
+            </a:pPr>
+            <a:r>
+              <a:rPr sz="850" b="0" i="1">
+                <a:solidFill>
+                  <a:srgbClr val="1C7293"/>
+                </a:solidFill>
+                <a:latin typeface="Arial"/>
+              </a:rPr>
+              <a:t>получить варианты облика, пока решение ещё не принято</a:t>
+            </a:r>
+          </a:p>
+        </p:txBody>
+      </p:sp>
+      <p:sp>
+        <p:nvSpPr>
+          <p:cNvPr id="20" name="Rectangle 19"/>
+          <p:cNvSpPr/>
+          <p:nvPr/>
+        </p:nvSpPr>
+        <p:spPr>
+          <a:xfrm>
+            <a:off x="3291839" y="2144915"/>
+            <a:ext cx="1679387" cy="652750"/>
+          </a:xfrm>
+          <a:prstGeom prst="rect">
+            <a:avLst/>
+          </a:prstGeom>
+          <a:solidFill>
+            <a:srgbClr val="F4F7FA"/>
+          </a:solidFill>
+          <a:ln w="9525">
+            <a:solidFill>
+              <a:srgbClr val="D9E2EC"/>
+            </a:solidFill>
+          </a:ln>
+          <a:effectLst/>
+        </p:spPr>
+        <p:txBody>
+          <a:bodyPr rtlCol="0" anchor="ctr"/>
+          <a:lstStyle/>
+          <a:p>
+            <a:pPr algn="ctr"/>
+          </a:p>
+        </p:txBody>
+      </p:sp>
+      <p:sp>
+        <p:nvSpPr>
+          <p:cNvPr id="21" name="Rectangle 20"/>
+          <p:cNvSpPr/>
+          <p:nvPr/>
+        </p:nvSpPr>
+        <p:spPr>
+          <a:xfrm>
+            <a:off x="4971227" y="2144915"/>
+            <a:ext cx="1679387" cy="652750"/>
+          </a:xfrm>
+          <a:prstGeom prst="rect">
+            <a:avLst/>
+          </a:prstGeom>
+          <a:solidFill>
+            <a:srgbClr val="F4F7FA"/>
+          </a:solidFill>
+          <a:ln w="9525">
+            <a:solidFill>
+              <a:srgbClr val="D9E2EC"/>
+            </a:solidFill>
+          </a:ln>
+          <a:effectLst/>
+        </p:spPr>
+        <p:txBody>
+          <a:bodyPr rtlCol="0" anchor="ctr"/>
+          <a:lstStyle/>
+          <a:p>
+            <a:pPr algn="ctr"/>
+          </a:p>
+        </p:txBody>
+      </p:sp>
+      <p:sp>
+        <p:nvSpPr>
+          <p:cNvPr id="22" name="Rectangle 21"/>
+          <p:cNvSpPr/>
+          <p:nvPr/>
+        </p:nvSpPr>
+        <p:spPr>
+          <a:xfrm>
+            <a:off x="6650614" y="2144915"/>
+            <a:ext cx="1679387" cy="652750"/>
+          </a:xfrm>
+          <a:prstGeom prst="rect">
+            <a:avLst/>
+          </a:prstGeom>
+          <a:solidFill>
+            <a:srgbClr val="F4F7FA"/>
+          </a:solidFill>
+          <a:ln w="9525">
+            <a:solidFill>
+              <a:srgbClr val="D9E2EC"/>
+            </a:solidFill>
+          </a:ln>
+          <a:effectLst/>
+        </p:spPr>
+        <p:txBody>
+          <a:bodyPr rtlCol="0" anchor="ctr"/>
+          <a:lstStyle/>
+          <a:p>
+            <a:pPr algn="ctr"/>
+          </a:p>
+        </p:txBody>
+      </p:sp>
+      <p:sp>
+        <p:nvSpPr>
+          <p:cNvPr id="23" name="Rectangle 22"/>
+          <p:cNvSpPr/>
+          <p:nvPr/>
+        </p:nvSpPr>
+        <p:spPr>
+          <a:xfrm>
+            <a:off x="8330001" y="2144915"/>
+            <a:ext cx="1679387" cy="652750"/>
+          </a:xfrm>
+          <a:prstGeom prst="rect">
+            <a:avLst/>
+          </a:prstGeom>
+          <a:solidFill>
+            <a:srgbClr val="F4F7FA"/>
+          </a:solidFill>
+          <a:ln w="9525">
+            <a:solidFill>
+              <a:srgbClr val="D9E2EC"/>
+            </a:solidFill>
+          </a:ln>
+          <a:effectLst/>
+        </p:spPr>
+        <p:txBody>
+          <a:bodyPr rtlCol="0" anchor="ctr"/>
+          <a:lstStyle/>
+          <a:p>
+            <a:pPr algn="ctr"/>
+          </a:p>
+        </p:txBody>
+      </p:sp>
+      <p:sp>
+        <p:nvSpPr>
+          <p:cNvPr id="24" name="Rectangle 23"/>
+          <p:cNvSpPr/>
+          <p:nvPr/>
+        </p:nvSpPr>
+        <p:spPr>
+          <a:xfrm>
+            <a:off x="10009388" y="2144915"/>
+            <a:ext cx="1679387" cy="652750"/>
+          </a:xfrm>
+          <a:prstGeom prst="rect">
+            <a:avLst/>
+          </a:prstGeom>
+          <a:solidFill>
+            <a:srgbClr val="F4F7FA"/>
+          </a:solidFill>
+          <a:ln w="9525">
+            <a:solidFill>
+              <a:srgbClr val="D9E2EC"/>
+            </a:solidFill>
+          </a:ln>
+          <a:effectLst/>
+        </p:spPr>
+        <p:txBody>
+          <a:bodyPr rtlCol="0" anchor="ctr"/>
+          <a:lstStyle/>
+          <a:p>
+            <a:pPr algn="ctr"/>
+          </a:p>
+        </p:txBody>
+      </p:sp>
+      <p:sp>
+        <p:nvSpPr>
+          <p:cNvPr id="25" name="Rectangle 24"/>
+          <p:cNvSpPr/>
+          <p:nvPr/>
+        </p:nvSpPr>
+        <p:spPr>
+          <a:xfrm>
+            <a:off x="502920" y="2797665"/>
+            <a:ext cx="2788920" cy="697152"/>
+          </a:xfrm>
+          <a:prstGeom prst="rect">
+            <a:avLst/>
+          </a:prstGeom>
+          <a:solidFill>
+            <a:srgbClr val="F4F7FA"/>
+          </a:solidFill>
+          <a:ln w="9525">
+            <a:solidFill>
+              <a:srgbClr val="D9E2EC"/>
+            </a:solidFill>
+          </a:ln>
+          <a:effectLst/>
+        </p:spPr>
+        <p:txBody>
+          <a:bodyPr rtlCol="0" anchor="ctr"/>
+          <a:lstStyle/>
+          <a:p>
+            <a:pPr algn="ctr"/>
+          </a:p>
+        </p:txBody>
+      </p:sp>
+      <p:sp>
+        <p:nvSpPr>
+          <p:cNvPr id="26" name="TextBox 25"/>
+          <p:cNvSpPr txBox="1"/>
+          <p:nvPr/>
+        </p:nvSpPr>
+        <p:spPr>
+          <a:xfrm>
+            <a:off x="566928" y="2861673"/>
+            <a:ext cx="2660903" cy="569136"/>
+          </a:xfrm>
+          <a:prstGeom prst="rect">
+            <a:avLst/>
+          </a:prstGeom>
+          <a:noFill/>
+        </p:spPr>
+        <p:txBody>
+          <a:bodyPr wrap="square" lIns="0" rIns="0" tIns="0" bIns="0" anchor="t">
+            <a:spAutoFit/>
+          </a:bodyPr>
+          <a:lstStyle/>
+          <a:p>
+            <a:pPr algn="l">
+              <a:lnSpc>
+                <a:spcPct val="113000"/>
+              </a:lnSpc>
+            </a:pPr>
+            <a:r>
+              <a:rPr sz="1100" b="1" i="0">
                 <a:solidFill>
                   <a:srgbClr val="21295C"/>
                 </a:solidFill>
                 <a:latin typeface="Arial"/>
               </a:rPr>
-              <a:t> — прибавится то, чего по отдельности в них не было: одна фраза, которой всё это можно сказать.</a:t>
-            </a:r>
-          </a:p>
-        </p:txBody>
-      </p:sp>
-      <p:sp>
-        <p:nvSpPr>
-          <p:cNvPr id="9" name="TextBox 8"/>
+              <a:t>Довести до производственного качества</a:t>
+            </a:r>
+          </a:p>
+          <a:p>
+            <a:pPr algn="l">
+              <a:lnSpc>
+                <a:spcPct val="113000"/>
+              </a:lnSpc>
+              <a:spcBef>
+                <a:spcPts val="200"/>
+              </a:spcBef>
+            </a:pPr>
+            <a:r>
+              <a:rPr sz="850" b="0" i="1">
+                <a:solidFill>
+                  <a:srgbClr val="1C7293"/>
+                </a:solidFill>
+                <a:latin typeface="Arial"/>
+              </a:rPr>
+              <a:t>отобрать, доработать и выпустить годное</a:t>
+            </a:r>
+          </a:p>
+        </p:txBody>
+      </p:sp>
+      <p:sp>
+        <p:nvSpPr>
+          <p:cNvPr id="27" name="Rectangle 26"/>
+          <p:cNvSpPr/>
+          <p:nvPr/>
+        </p:nvSpPr>
+        <p:spPr>
+          <a:xfrm>
+            <a:off x="3291839" y="2797665"/>
+            <a:ext cx="1679387" cy="697152"/>
+          </a:xfrm>
+          <a:prstGeom prst="rect">
+            <a:avLst/>
+          </a:prstGeom>
+          <a:solidFill>
+            <a:srgbClr val="F4F7FA"/>
+          </a:solidFill>
+          <a:ln w="9525">
+            <a:solidFill>
+              <a:srgbClr val="D9E2EC"/>
+            </a:solidFill>
+          </a:ln>
+          <a:effectLst/>
+        </p:spPr>
+        <p:txBody>
+          <a:bodyPr rtlCol="0" anchor="ctr"/>
+          <a:lstStyle/>
+          <a:p>
+            <a:pPr algn="ctr"/>
+          </a:p>
+        </p:txBody>
+      </p:sp>
+      <p:sp>
+        <p:nvSpPr>
+          <p:cNvPr id="28" name="Rectangle 27"/>
+          <p:cNvSpPr/>
+          <p:nvPr/>
+        </p:nvSpPr>
+        <p:spPr>
+          <a:xfrm>
+            <a:off x="4971227" y="2797665"/>
+            <a:ext cx="1679387" cy="697152"/>
+          </a:xfrm>
+          <a:prstGeom prst="rect">
+            <a:avLst/>
+          </a:prstGeom>
+          <a:solidFill>
+            <a:srgbClr val="F4F7FA"/>
+          </a:solidFill>
+          <a:ln w="9525">
+            <a:solidFill>
+              <a:srgbClr val="D9E2EC"/>
+            </a:solidFill>
+          </a:ln>
+          <a:effectLst/>
+        </p:spPr>
+        <p:txBody>
+          <a:bodyPr rtlCol="0" anchor="ctr"/>
+          <a:lstStyle/>
+          <a:p>
+            <a:pPr algn="ctr"/>
+          </a:p>
+        </p:txBody>
+      </p:sp>
+      <p:sp>
+        <p:nvSpPr>
+          <p:cNvPr id="29" name="Rectangle 28"/>
+          <p:cNvSpPr/>
+          <p:nvPr/>
+        </p:nvSpPr>
+        <p:spPr>
+          <a:xfrm>
+            <a:off x="6650614" y="2797665"/>
+            <a:ext cx="1679387" cy="697152"/>
+          </a:xfrm>
+          <a:prstGeom prst="rect">
+            <a:avLst/>
+          </a:prstGeom>
+          <a:solidFill>
+            <a:srgbClr val="F4F7FA"/>
+          </a:solidFill>
+          <a:ln w="9525">
+            <a:solidFill>
+              <a:srgbClr val="D9E2EC"/>
+            </a:solidFill>
+          </a:ln>
+          <a:effectLst/>
+        </p:spPr>
+        <p:txBody>
+          <a:bodyPr rtlCol="0" anchor="ctr"/>
+          <a:lstStyle/>
+          <a:p>
+            <a:pPr algn="ctr"/>
+          </a:p>
+        </p:txBody>
+      </p:sp>
+      <p:sp>
+        <p:nvSpPr>
+          <p:cNvPr id="30" name="Rectangle 29"/>
+          <p:cNvSpPr/>
+          <p:nvPr/>
+        </p:nvSpPr>
+        <p:spPr>
+          <a:xfrm>
+            <a:off x="8330001" y="2797665"/>
+            <a:ext cx="1679387" cy="697152"/>
+          </a:xfrm>
+          <a:prstGeom prst="rect">
+            <a:avLst/>
+          </a:prstGeom>
+          <a:solidFill>
+            <a:srgbClr val="F4F7FA"/>
+          </a:solidFill>
+          <a:ln w="9525">
+            <a:solidFill>
+              <a:srgbClr val="D9E2EC"/>
+            </a:solidFill>
+          </a:ln>
+          <a:effectLst/>
+        </p:spPr>
+        <p:txBody>
+          <a:bodyPr rtlCol="0" anchor="ctr"/>
+          <a:lstStyle/>
+          <a:p>
+            <a:pPr algn="ctr"/>
+          </a:p>
+        </p:txBody>
+      </p:sp>
+      <p:sp>
+        <p:nvSpPr>
+          <p:cNvPr id="31" name="Rectangle 30"/>
+          <p:cNvSpPr/>
+          <p:nvPr/>
+        </p:nvSpPr>
+        <p:spPr>
+          <a:xfrm>
+            <a:off x="10009388" y="2797665"/>
+            <a:ext cx="1679387" cy="697152"/>
+          </a:xfrm>
+          <a:prstGeom prst="rect">
+            <a:avLst/>
+          </a:prstGeom>
+          <a:solidFill>
+            <a:srgbClr val="F4F7FA"/>
+          </a:solidFill>
+          <a:ln w="9525">
+            <a:solidFill>
+              <a:srgbClr val="D9E2EC"/>
+            </a:solidFill>
+          </a:ln>
+          <a:effectLst/>
+        </p:spPr>
+        <p:txBody>
+          <a:bodyPr rtlCol="0" anchor="ctr"/>
+          <a:lstStyle/>
+          <a:p>
+            <a:pPr algn="ctr"/>
+          </a:p>
+        </p:txBody>
+      </p:sp>
+      <p:sp>
+        <p:nvSpPr>
+          <p:cNvPr id="32" name="Rectangle 31"/>
+          <p:cNvSpPr/>
+          <p:nvPr/>
+        </p:nvSpPr>
+        <p:spPr>
+          <a:xfrm>
+            <a:off x="502920" y="3494818"/>
+            <a:ext cx="2788920" cy="652750"/>
+          </a:xfrm>
+          <a:prstGeom prst="rect">
+            <a:avLst/>
+          </a:prstGeom>
+          <a:solidFill>
+            <a:srgbClr val="FFFFFF"/>
+          </a:solidFill>
+          <a:ln w="9525">
+            <a:solidFill>
+              <a:srgbClr val="D9E2EC"/>
+            </a:solidFill>
+          </a:ln>
+          <a:effectLst/>
+        </p:spPr>
+        <p:txBody>
+          <a:bodyPr rtlCol="0" anchor="ctr"/>
+          <a:lstStyle/>
+          <a:p>
+            <a:pPr algn="ctr"/>
+          </a:p>
+        </p:txBody>
+      </p:sp>
+      <p:sp>
+        <p:nvSpPr>
+          <p:cNvPr id="33" name="TextBox 32"/>
           <p:cNvSpPr txBox="1"/>
           <p:nvPr/>
         </p:nvSpPr>
         <p:spPr>
           <a:xfrm>
-            <a:off x="704088" y="3217513"/>
-            <a:ext cx="5742432" cy="942848"/>
+            <a:off x="566928" y="3558826"/>
+            <a:ext cx="2660903" cy="524734"/>
           </a:xfrm>
           <a:prstGeom prst="rect">
             <a:avLst/>
@@ -3988,27 +5041,1078 @@
           <a:p>
             <a:pPr algn="l">
               <a:lnSpc>
-                <a:spcPct val="124000"/>
+                <a:spcPct val="113000"/>
               </a:lnSpc>
             </a:pPr>
             <a:r>
-              <a:rPr sz="1550" b="1" i="0">
+              <a:rPr sz="1100" b="1" i="0">
                 <a:solidFill>
                   <a:srgbClr val="21295C"/>
                 </a:solidFill>
                 <a:latin typeface="Arial"/>
               </a:rPr>
-              <a:t>Три адреса · четыре рынка · четыре критерия отказа.</a:t>
-            </a:r>
-            <a:r>
-              <a:rPr sz="1550" b="0" i="0">
+              <a:t>Восстановить существующее</a:t>
+            </a:r>
+          </a:p>
+          <a:p>
+            <a:pPr algn="l">
+              <a:lnSpc>
+                <a:spcPct val="113000"/>
+              </a:lnSpc>
+              <a:spcBef>
+                <a:spcPts val="200"/>
+              </a:spcBef>
+            </a:pPr>
+            <a:r>
+              <a:rPr sz="850" b="0" i="1">
+                <a:solidFill>
+                  <a:srgbClr val="1C7293"/>
+                </a:solidFill>
+                <a:latin typeface="Arial"/>
+              </a:rPr>
+              <a:t>вытащить то, что уже записано, но читается плохо</a:t>
+            </a:r>
+          </a:p>
+        </p:txBody>
+      </p:sp>
+      <p:sp>
+        <p:nvSpPr>
+          <p:cNvPr id="34" name="Rectangle 33"/>
+          <p:cNvSpPr/>
+          <p:nvPr/>
+        </p:nvSpPr>
+        <p:spPr>
+          <a:xfrm>
+            <a:off x="3291839" y="3494818"/>
+            <a:ext cx="1679387" cy="652750"/>
+          </a:xfrm>
+          <a:prstGeom prst="rect">
+            <a:avLst/>
+          </a:prstGeom>
+          <a:solidFill>
+            <a:srgbClr val="F4F7FA"/>
+          </a:solidFill>
+          <a:ln w="9525">
+            <a:solidFill>
+              <a:srgbClr val="D9E2EC"/>
+            </a:solidFill>
+          </a:ln>
+          <a:effectLst/>
+        </p:spPr>
+        <p:txBody>
+          <a:bodyPr rtlCol="0" anchor="ctr"/>
+          <a:lstStyle/>
+          <a:p>
+            <a:pPr algn="ctr"/>
+          </a:p>
+        </p:txBody>
+      </p:sp>
+      <p:sp>
+        <p:nvSpPr>
+          <p:cNvPr id="35" name="Rectangle 34"/>
+          <p:cNvSpPr/>
+          <p:nvPr/>
+        </p:nvSpPr>
+        <p:spPr>
+          <a:xfrm>
+            <a:off x="4971227" y="3494818"/>
+            <a:ext cx="1679387" cy="652750"/>
+          </a:xfrm>
+          <a:prstGeom prst="rect">
+            <a:avLst/>
+          </a:prstGeom>
+          <a:solidFill>
+            <a:srgbClr val="F4F7FA"/>
+          </a:solidFill>
+          <a:ln w="9525">
+            <a:solidFill>
+              <a:srgbClr val="D9E2EC"/>
+            </a:solidFill>
+          </a:ln>
+          <a:effectLst/>
+        </p:spPr>
+        <p:txBody>
+          <a:bodyPr rtlCol="0" anchor="ctr"/>
+          <a:lstStyle/>
+          <a:p>
+            <a:pPr algn="ctr"/>
+          </a:p>
+        </p:txBody>
+      </p:sp>
+      <p:sp>
+        <p:nvSpPr>
+          <p:cNvPr id="36" name="Rectangle 35"/>
+          <p:cNvSpPr/>
+          <p:nvPr/>
+        </p:nvSpPr>
+        <p:spPr>
+          <a:xfrm>
+            <a:off x="6650614" y="3494818"/>
+            <a:ext cx="1679387" cy="652750"/>
+          </a:xfrm>
+          <a:prstGeom prst="rect">
+            <a:avLst/>
+          </a:prstGeom>
+          <a:solidFill>
+            <a:srgbClr val="F4F7FA"/>
+          </a:solidFill>
+          <a:ln w="9525">
+            <a:solidFill>
+              <a:srgbClr val="D9E2EC"/>
+            </a:solidFill>
+          </a:ln>
+          <a:effectLst/>
+        </p:spPr>
+        <p:txBody>
+          <a:bodyPr rtlCol="0" anchor="ctr"/>
+          <a:lstStyle/>
+          <a:p>
+            <a:pPr algn="ctr"/>
+          </a:p>
+        </p:txBody>
+      </p:sp>
+      <p:sp>
+        <p:nvSpPr>
+          <p:cNvPr id="37" name="Rectangle 36"/>
+          <p:cNvSpPr/>
+          <p:nvPr/>
+        </p:nvSpPr>
+        <p:spPr>
+          <a:xfrm>
+            <a:off x="8330001" y="3494818"/>
+            <a:ext cx="1679387" cy="652750"/>
+          </a:xfrm>
+          <a:prstGeom prst="rect">
+            <a:avLst/>
+          </a:prstGeom>
+          <a:solidFill>
+            <a:srgbClr val="F4F7FA"/>
+          </a:solidFill>
+          <a:ln w="9525">
+            <a:solidFill>
+              <a:srgbClr val="D9E2EC"/>
+            </a:solidFill>
+          </a:ln>
+          <a:effectLst/>
+        </p:spPr>
+        <p:txBody>
+          <a:bodyPr rtlCol="0" anchor="ctr"/>
+          <a:lstStyle/>
+          <a:p>
+            <a:pPr algn="ctr"/>
+          </a:p>
+        </p:txBody>
+      </p:sp>
+      <p:sp>
+        <p:nvSpPr>
+          <p:cNvPr id="38" name="Rectangle 37"/>
+          <p:cNvSpPr/>
+          <p:nvPr/>
+        </p:nvSpPr>
+        <p:spPr>
+          <a:xfrm>
+            <a:off x="10009388" y="3494818"/>
+            <a:ext cx="1679387" cy="652750"/>
+          </a:xfrm>
+          <a:prstGeom prst="rect">
+            <a:avLst/>
+          </a:prstGeom>
+          <a:solidFill>
+            <a:srgbClr val="F4F7FA"/>
+          </a:solidFill>
+          <a:ln w="9525">
+            <a:solidFill>
+              <a:srgbClr val="D9E2EC"/>
+            </a:solidFill>
+          </a:ln>
+          <a:effectLst/>
+        </p:spPr>
+        <p:txBody>
+          <a:bodyPr rtlCol="0" anchor="ctr"/>
+          <a:lstStyle/>
+          <a:p>
+            <a:pPr algn="ctr"/>
+          </a:p>
+        </p:txBody>
+      </p:sp>
+      <p:sp>
+        <p:nvSpPr>
+          <p:cNvPr id="39" name="Rectangle 38"/>
+          <p:cNvSpPr/>
+          <p:nvPr/>
+        </p:nvSpPr>
+        <p:spPr>
+          <a:xfrm>
+            <a:off x="502920" y="4147568"/>
+            <a:ext cx="2788920" cy="501783"/>
+          </a:xfrm>
+          <a:prstGeom prst="rect">
+            <a:avLst/>
+          </a:prstGeom>
+          <a:solidFill>
+            <a:srgbClr val="F4F7FA"/>
+          </a:solidFill>
+          <a:ln w="9525">
+            <a:solidFill>
+              <a:srgbClr val="D9E2EC"/>
+            </a:solidFill>
+          </a:ln>
+          <a:effectLst/>
+        </p:spPr>
+        <p:txBody>
+          <a:bodyPr rtlCol="0" anchor="ctr"/>
+          <a:lstStyle/>
+          <a:p>
+            <a:pPr algn="ctr"/>
+          </a:p>
+        </p:txBody>
+      </p:sp>
+      <p:sp>
+        <p:nvSpPr>
+          <p:cNvPr id="40" name="TextBox 39"/>
+          <p:cNvSpPr txBox="1"/>
+          <p:nvPr/>
+        </p:nvSpPr>
+        <p:spPr>
+          <a:xfrm>
+            <a:off x="566928" y="4211576"/>
+            <a:ext cx="2660903" cy="373767"/>
+          </a:xfrm>
+          <a:prstGeom prst="rect">
+            <a:avLst/>
+          </a:prstGeom>
+          <a:noFill/>
+        </p:spPr>
+        <p:txBody>
+          <a:bodyPr wrap="square" lIns="0" rIns="0" tIns="0" bIns="0" anchor="t">
+            <a:spAutoFit/>
+          </a:bodyPr>
+          <a:lstStyle/>
+          <a:p>
+            <a:pPr algn="l">
+              <a:lnSpc>
+                <a:spcPct val="113000"/>
+              </a:lnSpc>
+            </a:pPr>
+            <a:r>
+              <a:rPr sz="1100" b="1" i="0">
                 <a:solidFill>
                   <a:srgbClr val="21295C"/>
                 </a:solidFill>
                 <a:latin typeface="Arial"/>
               </a:rPr>
-              <a:t> И отдельно — куда идёт индустрия, по устройству рынка: оно меняется медленнее номеров версий.</a:t>
-            </a:r>
+              <a:t>Соблюсти точные величины</a:t>
+            </a:r>
+          </a:p>
+          <a:p>
+            <a:pPr algn="l">
+              <a:lnSpc>
+                <a:spcPct val="113000"/>
+              </a:lnSpc>
+              <a:spcBef>
+                <a:spcPts val="200"/>
+              </a:spcBef>
+            </a:pPr>
+            <a:r>
+              <a:rPr sz="850" b="0" i="1">
+                <a:solidFill>
+                  <a:srgbClr val="1C7293"/>
+                </a:solidFill>
+                <a:latin typeface="Arial"/>
+              </a:rPr>
+              <a:t>размеры, допуски, проверяемые условия</a:t>
+            </a:r>
+          </a:p>
+        </p:txBody>
+      </p:sp>
+      <p:sp>
+        <p:nvSpPr>
+          <p:cNvPr id="41" name="Rectangle 40"/>
+          <p:cNvSpPr/>
+          <p:nvPr/>
+        </p:nvSpPr>
+        <p:spPr>
+          <a:xfrm>
+            <a:off x="3291839" y="4147568"/>
+            <a:ext cx="1679387" cy="501783"/>
+          </a:xfrm>
+          <a:prstGeom prst="rect">
+            <a:avLst/>
+          </a:prstGeom>
+          <a:solidFill>
+            <a:srgbClr val="F4F7FA"/>
+          </a:solidFill>
+          <a:ln w="9525">
+            <a:solidFill>
+              <a:srgbClr val="D9E2EC"/>
+            </a:solidFill>
+          </a:ln>
+          <a:effectLst/>
+        </p:spPr>
+        <p:txBody>
+          <a:bodyPr rtlCol="0" anchor="ctr"/>
+          <a:lstStyle/>
+          <a:p>
+            <a:pPr algn="ctr"/>
+          </a:p>
+        </p:txBody>
+      </p:sp>
+      <p:sp>
+        <p:nvSpPr>
+          <p:cNvPr id="42" name="Rectangle 41"/>
+          <p:cNvSpPr/>
+          <p:nvPr/>
+        </p:nvSpPr>
+        <p:spPr>
+          <a:xfrm>
+            <a:off x="4971227" y="4147568"/>
+            <a:ext cx="1679387" cy="501783"/>
+          </a:xfrm>
+          <a:prstGeom prst="rect">
+            <a:avLst/>
+          </a:prstGeom>
+          <a:solidFill>
+            <a:srgbClr val="F4F7FA"/>
+          </a:solidFill>
+          <a:ln w="9525">
+            <a:solidFill>
+              <a:srgbClr val="D9E2EC"/>
+            </a:solidFill>
+          </a:ln>
+          <a:effectLst/>
+        </p:spPr>
+        <p:txBody>
+          <a:bodyPr rtlCol="0" anchor="ctr"/>
+          <a:lstStyle/>
+          <a:p>
+            <a:pPr algn="ctr"/>
+          </a:p>
+        </p:txBody>
+      </p:sp>
+      <p:sp>
+        <p:nvSpPr>
+          <p:cNvPr id="43" name="Rectangle 42"/>
+          <p:cNvSpPr/>
+          <p:nvPr/>
+        </p:nvSpPr>
+        <p:spPr>
+          <a:xfrm>
+            <a:off x="6650614" y="4147568"/>
+            <a:ext cx="1679387" cy="501783"/>
+          </a:xfrm>
+          <a:prstGeom prst="rect">
+            <a:avLst/>
+          </a:prstGeom>
+          <a:solidFill>
+            <a:srgbClr val="F4F7FA"/>
+          </a:solidFill>
+          <a:ln w="9525">
+            <a:solidFill>
+              <a:srgbClr val="D9E2EC"/>
+            </a:solidFill>
+          </a:ln>
+          <a:effectLst/>
+        </p:spPr>
+        <p:txBody>
+          <a:bodyPr rtlCol="0" anchor="ctr"/>
+          <a:lstStyle/>
+          <a:p>
+            <a:pPr algn="ctr"/>
+          </a:p>
+        </p:txBody>
+      </p:sp>
+      <p:sp>
+        <p:nvSpPr>
+          <p:cNvPr id="44" name="Rectangle 43"/>
+          <p:cNvSpPr/>
+          <p:nvPr/>
+        </p:nvSpPr>
+        <p:spPr>
+          <a:xfrm>
+            <a:off x="8330001" y="4147568"/>
+            <a:ext cx="1679387" cy="501783"/>
+          </a:xfrm>
+          <a:prstGeom prst="rect">
+            <a:avLst/>
+          </a:prstGeom>
+          <a:solidFill>
+            <a:srgbClr val="F4F7FA"/>
+          </a:solidFill>
+          <a:ln w="9525">
+            <a:solidFill>
+              <a:srgbClr val="D9E2EC"/>
+            </a:solidFill>
+          </a:ln>
+          <a:effectLst/>
+        </p:spPr>
+        <p:txBody>
+          <a:bodyPr rtlCol="0" anchor="ctr"/>
+          <a:lstStyle/>
+          <a:p>
+            <a:pPr algn="ctr"/>
+          </a:p>
+        </p:txBody>
+      </p:sp>
+      <p:sp>
+        <p:nvSpPr>
+          <p:cNvPr id="45" name="Rectangle 44"/>
+          <p:cNvSpPr/>
+          <p:nvPr/>
+        </p:nvSpPr>
+        <p:spPr>
+          <a:xfrm>
+            <a:off x="10009388" y="4147568"/>
+            <a:ext cx="1679387" cy="501783"/>
+          </a:xfrm>
+          <a:prstGeom prst="rect">
+            <a:avLst/>
+          </a:prstGeom>
+          <a:solidFill>
+            <a:srgbClr val="F4F7FA"/>
+          </a:solidFill>
+          <a:ln w="9525">
+            <a:solidFill>
+              <a:srgbClr val="D9E2EC"/>
+            </a:solidFill>
+          </a:ln>
+          <a:effectLst/>
+        </p:spPr>
+        <p:txBody>
+          <a:bodyPr rtlCol="0" anchor="ctr"/>
+          <a:lstStyle/>
+          <a:p>
+            <a:pPr algn="ctr"/>
+          </a:p>
+        </p:txBody>
+      </p:sp>
+      <p:sp>
+        <p:nvSpPr>
+          <p:cNvPr id="46" name="Rectangle 45"/>
+          <p:cNvSpPr/>
+          <p:nvPr/>
+        </p:nvSpPr>
+        <p:spPr>
+          <a:xfrm>
+            <a:off x="502920" y="4649352"/>
+            <a:ext cx="2788920" cy="697152"/>
+          </a:xfrm>
+          <a:prstGeom prst="rect">
+            <a:avLst/>
+          </a:prstGeom>
+          <a:solidFill>
+            <a:srgbClr val="FFFFFF"/>
+          </a:solidFill>
+          <a:ln w="9525">
+            <a:solidFill>
+              <a:srgbClr val="D9E2EC"/>
+            </a:solidFill>
+          </a:ln>
+          <a:effectLst/>
+        </p:spPr>
+        <p:txBody>
+          <a:bodyPr rtlCol="0" anchor="ctr"/>
+          <a:lstStyle/>
+          <a:p>
+            <a:pPr algn="ctr"/>
+          </a:p>
+        </p:txBody>
+      </p:sp>
+      <p:sp>
+        <p:nvSpPr>
+          <p:cNvPr id="47" name="TextBox 46"/>
+          <p:cNvSpPr txBox="1"/>
+          <p:nvPr/>
+        </p:nvSpPr>
+        <p:spPr>
+          <a:xfrm>
+            <a:off x="566928" y="4713360"/>
+            <a:ext cx="2660903" cy="569136"/>
+          </a:xfrm>
+          <a:prstGeom prst="rect">
+            <a:avLst/>
+          </a:prstGeom>
+          <a:noFill/>
+        </p:spPr>
+        <p:txBody>
+          <a:bodyPr wrap="square" lIns="0" rIns="0" tIns="0" bIns="0" anchor="t">
+            <a:spAutoFit/>
+          </a:bodyPr>
+          <a:lstStyle/>
+          <a:p>
+            <a:pPr algn="l">
+              <a:lnSpc>
+                <a:spcPct val="113000"/>
+              </a:lnSpc>
+            </a:pPr>
+            <a:r>
+              <a:rPr sz="1100" b="1" i="0">
+                <a:solidFill>
+                  <a:srgbClr val="21295C"/>
+                </a:solidFill>
+                <a:latin typeface="Arial"/>
+              </a:rPr>
+              <a:t>Уложиться в бюджет реального времени</a:t>
+            </a:r>
+          </a:p>
+          <a:p>
+            <a:pPr algn="l">
+              <a:lnSpc>
+                <a:spcPct val="113000"/>
+              </a:lnSpc>
+              <a:spcBef>
+                <a:spcPts val="200"/>
+              </a:spcBef>
+            </a:pPr>
+            <a:r>
+              <a:rPr sz="850" b="0" i="1">
+                <a:solidFill>
+                  <a:srgbClr val="1C7293"/>
+                </a:solidFill>
+                <a:latin typeface="Arial"/>
+              </a:rPr>
+              <a:t>успеть к сроку кадра, а не к сроку задачи</a:t>
+            </a:r>
+          </a:p>
+        </p:txBody>
+      </p:sp>
+      <p:sp>
+        <p:nvSpPr>
+          <p:cNvPr id="48" name="Rectangle 47"/>
+          <p:cNvSpPr/>
+          <p:nvPr/>
+        </p:nvSpPr>
+        <p:spPr>
+          <a:xfrm>
+            <a:off x="3291839" y="4649352"/>
+            <a:ext cx="1679387" cy="697152"/>
+          </a:xfrm>
+          <a:prstGeom prst="rect">
+            <a:avLst/>
+          </a:prstGeom>
+          <a:solidFill>
+            <a:srgbClr val="F4F7FA"/>
+          </a:solidFill>
+          <a:ln w="9525">
+            <a:solidFill>
+              <a:srgbClr val="D9E2EC"/>
+            </a:solidFill>
+          </a:ln>
+          <a:effectLst/>
+        </p:spPr>
+        <p:txBody>
+          <a:bodyPr rtlCol="0" anchor="ctr"/>
+          <a:lstStyle/>
+          <a:p>
+            <a:pPr algn="ctr"/>
+          </a:p>
+        </p:txBody>
+      </p:sp>
+      <p:sp>
+        <p:nvSpPr>
+          <p:cNvPr id="49" name="Rectangle 48"/>
+          <p:cNvSpPr/>
+          <p:nvPr/>
+        </p:nvSpPr>
+        <p:spPr>
+          <a:xfrm>
+            <a:off x="4971227" y="4649352"/>
+            <a:ext cx="1679387" cy="697152"/>
+          </a:xfrm>
+          <a:prstGeom prst="rect">
+            <a:avLst/>
+          </a:prstGeom>
+          <a:solidFill>
+            <a:srgbClr val="F4F7FA"/>
+          </a:solidFill>
+          <a:ln w="9525">
+            <a:solidFill>
+              <a:srgbClr val="D9E2EC"/>
+            </a:solidFill>
+          </a:ln>
+          <a:effectLst/>
+        </p:spPr>
+        <p:txBody>
+          <a:bodyPr rtlCol="0" anchor="ctr"/>
+          <a:lstStyle/>
+          <a:p>
+            <a:pPr algn="ctr"/>
+          </a:p>
+        </p:txBody>
+      </p:sp>
+      <p:sp>
+        <p:nvSpPr>
+          <p:cNvPr id="50" name="Rectangle 49"/>
+          <p:cNvSpPr/>
+          <p:nvPr/>
+        </p:nvSpPr>
+        <p:spPr>
+          <a:xfrm>
+            <a:off x="6650614" y="4649352"/>
+            <a:ext cx="1679387" cy="697152"/>
+          </a:xfrm>
+          <a:prstGeom prst="rect">
+            <a:avLst/>
+          </a:prstGeom>
+          <a:solidFill>
+            <a:srgbClr val="F4F7FA"/>
+          </a:solidFill>
+          <a:ln w="9525">
+            <a:solidFill>
+              <a:srgbClr val="D9E2EC"/>
+            </a:solidFill>
+          </a:ln>
+          <a:effectLst/>
+        </p:spPr>
+        <p:txBody>
+          <a:bodyPr rtlCol="0" anchor="ctr"/>
+          <a:lstStyle/>
+          <a:p>
+            <a:pPr algn="ctr"/>
+          </a:p>
+        </p:txBody>
+      </p:sp>
+      <p:sp>
+        <p:nvSpPr>
+          <p:cNvPr id="51" name="Rectangle 50"/>
+          <p:cNvSpPr/>
+          <p:nvPr/>
+        </p:nvSpPr>
+        <p:spPr>
+          <a:xfrm>
+            <a:off x="8330001" y="4649352"/>
+            <a:ext cx="1679387" cy="697152"/>
+          </a:xfrm>
+          <a:prstGeom prst="rect">
+            <a:avLst/>
+          </a:prstGeom>
+          <a:solidFill>
+            <a:srgbClr val="F4F7FA"/>
+          </a:solidFill>
+          <a:ln w="9525">
+            <a:solidFill>
+              <a:srgbClr val="D9E2EC"/>
+            </a:solidFill>
+          </a:ln>
+          <a:effectLst/>
+        </p:spPr>
+        <p:txBody>
+          <a:bodyPr rtlCol="0" anchor="ctr"/>
+          <a:lstStyle/>
+          <a:p>
+            <a:pPr algn="ctr"/>
+          </a:p>
+        </p:txBody>
+      </p:sp>
+      <p:sp>
+        <p:nvSpPr>
+          <p:cNvPr id="52" name="Rectangle 51"/>
+          <p:cNvSpPr/>
+          <p:nvPr/>
+        </p:nvSpPr>
+        <p:spPr>
+          <a:xfrm>
+            <a:off x="10009388" y="4649352"/>
+            <a:ext cx="1679387" cy="697152"/>
+          </a:xfrm>
+          <a:prstGeom prst="rect">
+            <a:avLst/>
+          </a:prstGeom>
+          <a:solidFill>
+            <a:srgbClr val="F4F7FA"/>
+          </a:solidFill>
+          <a:ln w="9525">
+            <a:solidFill>
+              <a:srgbClr val="D9E2EC"/>
+            </a:solidFill>
+          </a:ln>
+          <a:effectLst/>
+        </p:spPr>
+        <p:txBody>
+          <a:bodyPr rtlCol="0" anchor="ctr"/>
+          <a:lstStyle/>
+          <a:p>
+            <a:pPr algn="ctr"/>
+          </a:p>
+        </p:txBody>
+      </p:sp>
+      <p:sp>
+        <p:nvSpPr>
+          <p:cNvPr id="53" name="Rectangle 52"/>
+          <p:cNvSpPr/>
+          <p:nvPr/>
+        </p:nvSpPr>
+        <p:spPr>
+          <a:xfrm>
+            <a:off x="502920" y="5346504"/>
+            <a:ext cx="2788920" cy="501783"/>
+          </a:xfrm>
+          <a:prstGeom prst="rect">
+            <a:avLst/>
+          </a:prstGeom>
+          <a:solidFill>
+            <a:srgbClr val="F4F7FA"/>
+          </a:solidFill>
+          <a:ln w="9525">
+            <a:solidFill>
+              <a:srgbClr val="D9E2EC"/>
+            </a:solidFill>
+          </a:ln>
+          <a:effectLst/>
+        </p:spPr>
+        <p:txBody>
+          <a:bodyPr rtlCol="0" anchor="ctr"/>
+          <a:lstStyle/>
+          <a:p>
+            <a:pPr algn="ctr"/>
+          </a:p>
+        </p:txBody>
+      </p:sp>
+      <p:sp>
+        <p:nvSpPr>
+          <p:cNvPr id="54" name="TextBox 53"/>
+          <p:cNvSpPr txBox="1"/>
+          <p:nvPr/>
+        </p:nvSpPr>
+        <p:spPr>
+          <a:xfrm>
+            <a:off x="566928" y="5410512"/>
+            <a:ext cx="2660903" cy="373767"/>
+          </a:xfrm>
+          <a:prstGeom prst="rect">
+            <a:avLst/>
+          </a:prstGeom>
+          <a:noFill/>
+        </p:spPr>
+        <p:txBody>
+          <a:bodyPr wrap="square" lIns="0" rIns="0" tIns="0" bIns="0" anchor="t">
+            <a:spAutoFit/>
+          </a:bodyPr>
+          <a:lstStyle/>
+          <a:p>
+            <a:pPr algn="l">
+              <a:lnSpc>
+                <a:spcPct val="113000"/>
+              </a:lnSpc>
+            </a:pPr>
+            <a:r>
+              <a:rPr sz="1100" b="1" i="0">
+                <a:solidFill>
+                  <a:srgbClr val="21295C"/>
+                </a:solidFill>
+                <a:latin typeface="Arial"/>
+              </a:rPr>
+              <a:t>Ответить «кто отвечает»</a:t>
+            </a:r>
+          </a:p>
+          <a:p>
+            <a:pPr algn="l">
+              <a:lnSpc>
+                <a:spcPct val="113000"/>
+              </a:lnSpc>
+              <a:spcBef>
+                <a:spcPts val="200"/>
+              </a:spcBef>
+            </a:pPr>
+            <a:r>
+              <a:rPr sz="850" b="0" i="1">
+                <a:solidFill>
+                  <a:srgbClr val="1C7293"/>
+                </a:solidFill>
+                <a:latin typeface="Arial"/>
+              </a:rPr>
+              <a:t>происхождение, права, подпись под результатом</a:t>
+            </a:r>
+          </a:p>
+        </p:txBody>
+      </p:sp>
+      <p:sp>
+        <p:nvSpPr>
+          <p:cNvPr id="55" name="Rectangle 54"/>
+          <p:cNvSpPr/>
+          <p:nvPr/>
+        </p:nvSpPr>
+        <p:spPr>
+          <a:xfrm>
+            <a:off x="3291839" y="5346504"/>
+            <a:ext cx="1679387" cy="501783"/>
+          </a:xfrm>
+          <a:prstGeom prst="rect">
+            <a:avLst/>
+          </a:prstGeom>
+          <a:solidFill>
+            <a:srgbClr val="F4F7FA"/>
+          </a:solidFill>
+          <a:ln w="9525">
+            <a:solidFill>
+              <a:srgbClr val="D9E2EC"/>
+            </a:solidFill>
+          </a:ln>
+          <a:effectLst/>
+        </p:spPr>
+        <p:txBody>
+          <a:bodyPr rtlCol="0" anchor="ctr"/>
+          <a:lstStyle/>
+          <a:p>
+            <a:pPr algn="ctr"/>
+          </a:p>
+        </p:txBody>
+      </p:sp>
+      <p:sp>
+        <p:nvSpPr>
+          <p:cNvPr id="56" name="Rectangle 55"/>
+          <p:cNvSpPr/>
+          <p:nvPr/>
+        </p:nvSpPr>
+        <p:spPr>
+          <a:xfrm>
+            <a:off x="4971227" y="5346504"/>
+            <a:ext cx="1679387" cy="501783"/>
+          </a:xfrm>
+          <a:prstGeom prst="rect">
+            <a:avLst/>
+          </a:prstGeom>
+          <a:solidFill>
+            <a:srgbClr val="F4F7FA"/>
+          </a:solidFill>
+          <a:ln w="9525">
+            <a:solidFill>
+              <a:srgbClr val="D9E2EC"/>
+            </a:solidFill>
+          </a:ln>
+          <a:effectLst/>
+        </p:spPr>
+        <p:txBody>
+          <a:bodyPr rtlCol="0" anchor="ctr"/>
+          <a:lstStyle/>
+          <a:p>
+            <a:pPr algn="ctr"/>
+          </a:p>
+        </p:txBody>
+      </p:sp>
+      <p:sp>
+        <p:nvSpPr>
+          <p:cNvPr id="57" name="Rectangle 56"/>
+          <p:cNvSpPr/>
+          <p:nvPr/>
+        </p:nvSpPr>
+        <p:spPr>
+          <a:xfrm>
+            <a:off x="6650614" y="5346504"/>
+            <a:ext cx="1679387" cy="501783"/>
+          </a:xfrm>
+          <a:prstGeom prst="rect">
+            <a:avLst/>
+          </a:prstGeom>
+          <a:solidFill>
+            <a:srgbClr val="F4F7FA"/>
+          </a:solidFill>
+          <a:ln w="9525">
+            <a:solidFill>
+              <a:srgbClr val="D9E2EC"/>
+            </a:solidFill>
+          </a:ln>
+          <a:effectLst/>
+        </p:spPr>
+        <p:txBody>
+          <a:bodyPr rtlCol="0" anchor="ctr"/>
+          <a:lstStyle/>
+          <a:p>
+            <a:pPr algn="ctr"/>
+          </a:p>
+        </p:txBody>
+      </p:sp>
+      <p:sp>
+        <p:nvSpPr>
+          <p:cNvPr id="58" name="Rectangle 57"/>
+          <p:cNvSpPr/>
+          <p:nvPr/>
+        </p:nvSpPr>
+        <p:spPr>
+          <a:xfrm>
+            <a:off x="8330001" y="5346504"/>
+            <a:ext cx="1679387" cy="501783"/>
+          </a:xfrm>
+          <a:prstGeom prst="rect">
+            <a:avLst/>
+          </a:prstGeom>
+          <a:solidFill>
+            <a:srgbClr val="F4F7FA"/>
+          </a:solidFill>
+          <a:ln w="9525">
+            <a:solidFill>
+              <a:srgbClr val="D9E2EC"/>
+            </a:solidFill>
+          </a:ln>
+          <a:effectLst/>
+        </p:spPr>
+        <p:txBody>
+          <a:bodyPr rtlCol="0" anchor="ctr"/>
+          <a:lstStyle/>
+          <a:p>
+            <a:pPr algn="ctr"/>
+          </a:p>
+        </p:txBody>
+      </p:sp>
+      <p:sp>
+        <p:nvSpPr>
+          <p:cNvPr id="59" name="Rectangle 58"/>
+          <p:cNvSpPr/>
+          <p:nvPr/>
+        </p:nvSpPr>
+        <p:spPr>
+          <a:xfrm>
+            <a:off x="10009388" y="5346504"/>
+            <a:ext cx="1679387" cy="501783"/>
+          </a:xfrm>
+          <a:prstGeom prst="rect">
+            <a:avLst/>
+          </a:prstGeom>
+          <a:solidFill>
+            <a:srgbClr val="F4F7FA"/>
+          </a:solidFill>
+          <a:ln w="9525">
+            <a:solidFill>
+              <a:srgbClr val="D9E2EC"/>
+            </a:solidFill>
+          </a:ln>
+          <a:effectLst/>
+        </p:spPr>
+        <p:txBody>
+          <a:bodyPr rtlCol="0" anchor="ctr"/>
+          <a:lstStyle/>
+          <a:p>
+            <a:pPr algn="ctr"/>
+          </a:p>
+        </p:txBody>
+      </p:sp>
+      <p:sp>
+        <p:nvSpPr>
+          <p:cNvPr id="60" name="Rounded Rectangle 59"/>
+          <p:cNvSpPr/>
+          <p:nvPr/>
+        </p:nvSpPr>
+        <p:spPr>
+          <a:xfrm>
+            <a:off x="502920" y="5930584"/>
+            <a:ext cx="11185855" cy="305623"/>
+          </a:xfrm>
+          <a:prstGeom prst="roundRect">
+            <a:avLst>
+              <a:gd name="adj" fmla="val 14000"/>
+            </a:avLst>
+          </a:prstGeom>
+          <a:solidFill>
+            <a:srgbClr val="FEF5E0"/>
+          </a:solidFill>
+          <a:ln>
+            <a:noFill/>
+          </a:ln>
+          <a:effectLst/>
+        </p:spPr>
+        <p:txBody>
+          <a:bodyPr rtlCol="0" anchor="ctr"/>
+          <a:lstStyle/>
+          <a:p>
+            <a:pPr algn="ctr"/>
+          </a:p>
+        </p:txBody>
+      </p:sp>
+      <p:sp>
+        <p:nvSpPr>
+          <p:cNvPr id="61" name="Rectangle 60"/>
+          <p:cNvSpPr/>
+          <p:nvPr/>
+        </p:nvSpPr>
+        <p:spPr>
+          <a:xfrm>
+            <a:off x="502920" y="5930584"/>
+            <a:ext cx="68580" cy="305623"/>
+          </a:xfrm>
+          <a:prstGeom prst="rect">
+            <a:avLst/>
+          </a:prstGeom>
+          <a:solidFill>
+            <a:srgbClr val="F0AB00"/>
+          </a:solidFill>
+          <a:ln>
+            <a:noFill/>
+          </a:ln>
+          <a:effectLst/>
+        </p:spPr>
+        <p:txBody>
+          <a:bodyPr rtlCol="0" anchor="ctr"/>
+          <a:lstStyle/>
+          <a:p>
+            <a:pPr algn="ctr"/>
+          </a:p>
+        </p:txBody>
+      </p:sp>
+      <p:sp>
+        <p:nvSpPr>
+          <p:cNvPr id="62" name="TextBox 61"/>
+          <p:cNvSpPr txBox="1"/>
+          <p:nvPr/>
+        </p:nvSpPr>
+        <p:spPr>
+          <a:xfrm>
+            <a:off x="685800" y="5994592"/>
+            <a:ext cx="10783519" cy="177607"/>
+          </a:xfrm>
+          <a:prstGeom prst="rect">
+            <a:avLst/>
+          </a:prstGeom>
+          <a:noFill/>
+        </p:spPr>
+        <p:txBody>
+          <a:bodyPr wrap="square" lIns="0" rIns="0" tIns="0" bIns="0" anchor="t">
+            <a:spAutoFit/>
+          </a:bodyPr>
+          <a:lstStyle/>
+          <a:p>
+            <a:pPr algn="l">
+              <a:lnSpc>
+                <a:spcPct val="113000"/>
+              </a:lnSpc>
+            </a:pPr>
+            <a:r>
+              <a:rPr sz="1000" b="0" i="0">
+                <a:solidFill>
+                  <a:srgbClr val="21295C"/>
+                </a:solidFill>
+                <a:latin typeface="Arial"/>
+              </a:rPr>
+              <a:t>АДРЕС ПЛАТЕЖА   накапливается по разделам: отбор · права · узнавание</a:t>
+            </a:r>
+          </a:p>
+        </p:txBody>
+      </p:sp>
+      <p:sp>
+        <p:nvSpPr>
+          <p:cNvPr id="63" name="Rectangle 62"/>
+          <p:cNvSpPr/>
+          <p:nvPr/>
+        </p:nvSpPr>
+        <p:spPr>
+          <a:xfrm>
+            <a:off x="502920" y="888090"/>
+            <a:ext cx="960120" cy="50292"/>
+          </a:xfrm>
+          <a:prstGeom prst="rect">
+            <a:avLst/>
+          </a:prstGeom>
+          <a:solidFill>
+            <a:srgbClr val="F0AB00"/>
+          </a:solidFill>
+          <a:ln>
+            <a:noFill/>
+          </a:ln>
+          <a:effectLst/>
+        </p:spPr>
+        <p:txBody>
+          <a:bodyPr rtlCol="0" anchor="ctr"/>
+          <a:lstStyle/>
+          <a:p>
+            <a:pPr algn="ctr"/>
           </a:p>
         </p:txBody>
       </p:sp>
@@ -4088,654 +6192,31 @@
               </a:lnSpc>
             </a:pPr>
             <a:r>
-              <a:rPr sz="2100" b="1" i="0">
+              <a:rPr sz="2700" b="1" i="0">
                 <a:solidFill>
                   <a:srgbClr val="21295C"/>
                 </a:solidFill>
                 <a:latin typeface="Arial"/>
               </a:rPr>
-              <a:t>Два режима работы человека с моделью, и разброс схлопывается только в одном</a:t>
-            </a:r>
-          </a:p>
-        </p:txBody>
-      </p:sp>
-      <p:sp>
-        <p:nvSpPr>
-          <p:cNvPr id="4" name="TextBox 3"/>
-          <p:cNvSpPr txBox="1"/>
-          <p:nvPr/>
-        </p:nvSpPr>
-        <p:spPr>
-          <a:xfrm>
-            <a:off x="502920" y="1371600"/>
-            <a:ext cx="1307592" cy="828231"/>
-          </a:xfrm>
-          <a:prstGeom prst="rect">
-            <a:avLst/>
-          </a:prstGeom>
-          <a:noFill/>
-        </p:spPr>
-        <p:txBody>
-          <a:bodyPr wrap="square" lIns="0" rIns="0" tIns="0" bIns="0" anchor="ctr">
-            <a:spAutoFit/>
-          </a:bodyPr>
-          <a:lstStyle/>
-          <a:p>
-            <a:pPr algn="l">
-              <a:lnSpc>
-                <a:spcPct val="110000"/>
-              </a:lnSpc>
-            </a:pPr>
-            <a:r>
-              <a:rPr sz="1200" b="1" i="0">
-                <a:solidFill>
-                  <a:srgbClr val="065A82"/>
-                </a:solidFill>
-                <a:latin typeface="Arial"/>
-              </a:rPr>
-              <a:t>Разброс схлопывается</a:t>
-            </a:r>
-          </a:p>
-        </p:txBody>
-      </p:sp>
-      <p:sp>
-        <p:nvSpPr>
-          <p:cNvPr id="5" name="Rounded Rectangle 4"/>
+              <a:t>Накопительная карта: дописана колонка «Видео»</a:t>
+            </a:r>
+          </a:p>
+        </p:txBody>
+      </p:sp>
+      <p:sp>
+        <p:nvSpPr>
+          <p:cNvPr id="4" name="Rounded Rectangle 3"/>
           <p:cNvSpPr/>
           <p:nvPr/>
         </p:nvSpPr>
         <p:spPr>
           <a:xfrm>
-            <a:off x="2011680" y="1335024"/>
-            <a:ext cx="9677095" cy="901383"/>
+            <a:off x="374904" y="1243584"/>
+            <a:ext cx="11441887" cy="810418"/>
           </a:xfrm>
           <a:prstGeom prst="roundRect">
             <a:avLst>
               <a:gd name="adj" fmla="val 25000"/>
-            </a:avLst>
-          </a:prstGeom>
-          <a:solidFill>
-            <a:srgbClr val="F4F7FA"/>
-          </a:solidFill>
-          <a:ln w="15240">
-            <a:solidFill>
-              <a:srgbClr val="1C7293"/>
-            </a:solidFill>
-          </a:ln>
-          <a:effectLst/>
-        </p:spPr>
-        <p:txBody>
-          <a:bodyPr rtlCol="0" anchor="ctr"/>
-          <a:lstStyle/>
-          <a:p>
-            <a:pPr algn="ctr"/>
-          </a:p>
-        </p:txBody>
-      </p:sp>
-      <p:sp>
-        <p:nvSpPr>
-          <p:cNvPr id="6" name="Rounded Rectangle 5"/>
-          <p:cNvSpPr/>
-          <p:nvPr/>
-        </p:nvSpPr>
-        <p:spPr>
-          <a:xfrm>
-            <a:off x="2103120" y="1362456"/>
-            <a:ext cx="3103778" cy="846519"/>
-          </a:xfrm>
-          <a:prstGeom prst="roundRect">
-            <a:avLst>
-              <a:gd name="adj" fmla="val 25000"/>
-            </a:avLst>
-          </a:prstGeom>
-          <a:solidFill>
-            <a:srgbClr val="FFFFFF"/>
-          </a:solidFill>
-          <a:ln w="16510">
-            <a:solidFill>
-              <a:srgbClr val="1C7293"/>
-            </a:solidFill>
-          </a:ln>
-          <a:effectLst/>
-        </p:spPr>
-        <p:txBody>
-          <a:bodyPr rtlCol="0" anchor="ctr"/>
-          <a:lstStyle/>
-          <a:p>
-            <a:pPr algn="ctr"/>
-          </a:p>
-        </p:txBody>
-      </p:sp>
-      <p:sp>
-        <p:nvSpPr>
-          <p:cNvPr id="7" name="TextBox 6"/>
-          <p:cNvSpPr txBox="1"/>
-          <p:nvPr/>
-        </p:nvSpPr>
-        <p:spPr>
-          <a:xfrm>
-            <a:off x="2185416" y="1408176"/>
-            <a:ext cx="2939186" cy="755079"/>
-          </a:xfrm>
-          <a:prstGeom prst="rect">
-            <a:avLst/>
-          </a:prstGeom>
-          <a:noFill/>
-        </p:spPr>
-        <p:txBody>
-          <a:bodyPr wrap="square" lIns="0" rIns="0" tIns="0" bIns="0" anchor="ctr">
-            <a:spAutoFit/>
-          </a:bodyPr>
-          <a:lstStyle/>
-          <a:p>
-            <a:pPr algn="ctr">
-              <a:lnSpc>
-                <a:spcPct val="110000"/>
-              </a:lnSpc>
-            </a:pPr>
-            <a:r>
-              <a:rPr sz="1350" b="0" i="0">
-                <a:solidFill>
-                  <a:srgbClr val="21295C"/>
-                </a:solidFill>
-                <a:latin typeface="Arial"/>
-              </a:rPr>
-              <a:t>человек делегирует работу целиком и говорит с моделью как с собеседником</a:t>
-            </a:r>
-          </a:p>
-        </p:txBody>
-      </p:sp>
-      <p:sp>
-        <p:nvSpPr>
-          <p:cNvPr id="8" name="Rounded Rectangle 7"/>
-          <p:cNvSpPr/>
-          <p:nvPr/>
-        </p:nvSpPr>
-        <p:spPr>
-          <a:xfrm>
-            <a:off x="5298338" y="1362456"/>
-            <a:ext cx="3103778" cy="846519"/>
-          </a:xfrm>
-          <a:prstGeom prst="roundRect">
-            <a:avLst>
-              <a:gd name="adj" fmla="val 25000"/>
-            </a:avLst>
-          </a:prstGeom>
-          <a:solidFill>
-            <a:srgbClr val="FFFFFF"/>
-          </a:solidFill>
-          <a:ln w="16510">
-            <a:solidFill>
-              <a:srgbClr val="1C7293"/>
-            </a:solidFill>
-          </a:ln>
-          <a:effectLst/>
-        </p:spPr>
-        <p:txBody>
-          <a:bodyPr rtlCol="0" anchor="ctr"/>
-          <a:lstStyle/>
-          <a:p>
-            <a:pPr algn="ctr"/>
-          </a:p>
-        </p:txBody>
-      </p:sp>
-      <p:sp>
-        <p:nvSpPr>
-          <p:cNvPr id="9" name="TextBox 8"/>
-          <p:cNvSpPr txBox="1"/>
-          <p:nvPr/>
-        </p:nvSpPr>
-        <p:spPr>
-          <a:xfrm>
-            <a:off x="5380634" y="1408176"/>
-            <a:ext cx="2939186" cy="755079"/>
-          </a:xfrm>
-          <a:prstGeom prst="rect">
-            <a:avLst/>
-          </a:prstGeom>
-          <a:noFill/>
-        </p:spPr>
-        <p:txBody>
-          <a:bodyPr wrap="square" lIns="0" rIns="0" tIns="0" bIns="0" anchor="ctr">
-            <a:spAutoFit/>
-          </a:bodyPr>
-          <a:lstStyle/>
-          <a:p>
-            <a:pPr algn="ctr">
-              <a:lnSpc>
-                <a:spcPct val="110000"/>
-              </a:lnSpc>
-            </a:pPr>
-            <a:r>
-              <a:rPr sz="1350" b="0" i="0">
-                <a:solidFill>
-                  <a:srgbClr val="21295C"/>
-                </a:solidFill>
-                <a:latin typeface="Arial"/>
-              </a:rPr>
-              <a:t>работы выходят заметно более похожими друг на друга</a:t>
-            </a:r>
-          </a:p>
-        </p:txBody>
-      </p:sp>
-      <p:sp>
-        <p:nvSpPr>
-          <p:cNvPr id="10" name="Rounded Rectangle 9"/>
-          <p:cNvSpPr/>
-          <p:nvPr/>
-        </p:nvSpPr>
-        <p:spPr>
-          <a:xfrm>
-            <a:off x="8493556" y="1362456"/>
-            <a:ext cx="3103778" cy="846519"/>
-          </a:xfrm>
-          <a:prstGeom prst="roundRect">
-            <a:avLst>
-              <a:gd name="adj" fmla="val 25000"/>
-            </a:avLst>
-          </a:prstGeom>
-          <a:solidFill>
-            <a:srgbClr val="FFFFFF"/>
-          </a:solidFill>
-          <a:ln w="16510">
-            <a:solidFill>
-              <a:srgbClr val="1C7293"/>
-            </a:solidFill>
-          </a:ln>
-          <a:effectLst/>
-        </p:spPr>
-        <p:txBody>
-          <a:bodyPr rtlCol="0" anchor="ctr"/>
-          <a:lstStyle/>
-          <a:p>
-            <a:pPr algn="ctr"/>
-          </a:p>
-        </p:txBody>
-      </p:sp>
-      <p:sp>
-        <p:nvSpPr>
-          <p:cNvPr id="11" name="TextBox 10"/>
-          <p:cNvSpPr txBox="1"/>
-          <p:nvPr/>
-        </p:nvSpPr>
-        <p:spPr>
-          <a:xfrm>
-            <a:off x="8575852" y="1408176"/>
-            <a:ext cx="2939186" cy="755079"/>
-          </a:xfrm>
-          <a:prstGeom prst="rect">
-            <a:avLst/>
-          </a:prstGeom>
-          <a:noFill/>
-        </p:spPr>
-        <p:txBody>
-          <a:bodyPr wrap="square" lIns="0" rIns="0" tIns="0" bIns="0" anchor="ctr">
-            <a:spAutoFit/>
-          </a:bodyPr>
-          <a:lstStyle/>
-          <a:p>
-            <a:pPr algn="ctr">
-              <a:lnSpc>
-                <a:spcPct val="110000"/>
-              </a:lnSpc>
-            </a:pPr>
-            <a:r>
-              <a:rPr sz="1350" b="0" i="0">
-                <a:solidFill>
-                  <a:srgbClr val="21295C"/>
-                </a:solidFill>
-                <a:latin typeface="Arial"/>
-              </a:rPr>
-              <a:t>если ценность в отклонении от центра ожиданий — режим её уничтожает</a:t>
-            </a:r>
-          </a:p>
-        </p:txBody>
-      </p:sp>
-      <p:sp>
-        <p:nvSpPr>
-          <p:cNvPr id="12" name="TextBox 11"/>
-          <p:cNvSpPr txBox="1"/>
-          <p:nvPr/>
-        </p:nvSpPr>
-        <p:spPr>
-          <a:xfrm>
-            <a:off x="502920" y="2382711"/>
-            <a:ext cx="1307592" cy="828231"/>
-          </a:xfrm>
-          <a:prstGeom prst="rect">
-            <a:avLst/>
-          </a:prstGeom>
-          <a:noFill/>
-        </p:spPr>
-        <p:txBody>
-          <a:bodyPr wrap="square" lIns="0" rIns="0" tIns="0" bIns="0" anchor="ctr">
-            <a:spAutoFit/>
-          </a:bodyPr>
-          <a:lstStyle/>
-          <a:p>
-            <a:pPr algn="l">
-              <a:lnSpc>
-                <a:spcPct val="110000"/>
-              </a:lnSpc>
-            </a:pPr>
-            <a:r>
-              <a:rPr sz="1200" b="1" i="0">
-                <a:solidFill>
-                  <a:srgbClr val="065A82"/>
-                </a:solidFill>
-                <a:latin typeface="Arial"/>
-              </a:rPr>
-              <a:t>Не схлопывается</a:t>
-            </a:r>
-          </a:p>
-        </p:txBody>
-      </p:sp>
-      <p:sp>
-        <p:nvSpPr>
-          <p:cNvPr id="13" name="Rounded Rectangle 12"/>
-          <p:cNvSpPr/>
-          <p:nvPr/>
-        </p:nvSpPr>
-        <p:spPr>
-          <a:xfrm>
-            <a:off x="2011680" y="2346135"/>
-            <a:ext cx="9677095" cy="901383"/>
-          </a:xfrm>
-          <a:prstGeom prst="roundRect">
-            <a:avLst>
-              <a:gd name="adj" fmla="val 25000"/>
-            </a:avLst>
-          </a:prstGeom>
-          <a:solidFill>
-            <a:srgbClr val="F4F7FA"/>
-          </a:solidFill>
-          <a:ln w="15240">
-            <a:solidFill>
-              <a:srgbClr val="1C7293"/>
-            </a:solidFill>
-          </a:ln>
-          <a:effectLst/>
-        </p:spPr>
-        <p:txBody>
-          <a:bodyPr rtlCol="0" anchor="ctr"/>
-          <a:lstStyle/>
-          <a:p>
-            <a:pPr algn="ctr"/>
-          </a:p>
-        </p:txBody>
-      </p:sp>
-      <p:sp>
-        <p:nvSpPr>
-          <p:cNvPr id="14" name="Rounded Rectangle 13"/>
-          <p:cNvSpPr/>
-          <p:nvPr/>
-        </p:nvSpPr>
-        <p:spPr>
-          <a:xfrm>
-            <a:off x="2103120" y="2373567"/>
-            <a:ext cx="3103778" cy="846519"/>
-          </a:xfrm>
-          <a:prstGeom prst="roundRect">
-            <a:avLst>
-              <a:gd name="adj" fmla="val 25000"/>
-            </a:avLst>
-          </a:prstGeom>
-          <a:solidFill>
-            <a:srgbClr val="FFFFFF"/>
-          </a:solidFill>
-          <a:ln w="16510">
-            <a:solidFill>
-              <a:srgbClr val="1C7293"/>
-            </a:solidFill>
-          </a:ln>
-          <a:effectLst/>
-        </p:spPr>
-        <p:txBody>
-          <a:bodyPr rtlCol="0" anchor="ctr"/>
-          <a:lstStyle/>
-          <a:p>
-            <a:pPr algn="ctr"/>
-          </a:p>
-        </p:txBody>
-      </p:sp>
-      <p:sp>
-        <p:nvSpPr>
-          <p:cNvPr id="15" name="TextBox 14"/>
-          <p:cNvSpPr txBox="1"/>
-          <p:nvPr/>
-        </p:nvSpPr>
-        <p:spPr>
-          <a:xfrm>
-            <a:off x="2185416" y="2419287"/>
-            <a:ext cx="2939186" cy="755079"/>
-          </a:xfrm>
-          <a:prstGeom prst="rect">
-            <a:avLst/>
-          </a:prstGeom>
-          <a:noFill/>
-        </p:spPr>
-        <p:txBody>
-          <a:bodyPr wrap="square" lIns="0" rIns="0" tIns="0" bIns="0" anchor="ctr">
-            <a:spAutoFit/>
-          </a:bodyPr>
-          <a:lstStyle/>
-          <a:p>
-            <a:pPr algn="ctr">
-              <a:lnSpc>
-                <a:spcPct val="110000"/>
-              </a:lnSpc>
-            </a:pPr>
-            <a:r>
-              <a:rPr sz="1350" b="0" i="0">
-                <a:solidFill>
-                  <a:srgbClr val="21295C"/>
-                </a:solidFill>
-                <a:latin typeface="Arial"/>
-              </a:rPr>
-              <a:t>человек ставит задачу, разбирает результат, ставит следующую</a:t>
-            </a:r>
-          </a:p>
-        </p:txBody>
-      </p:sp>
-      <p:sp>
-        <p:nvSpPr>
-          <p:cNvPr id="16" name="Rounded Rectangle 15"/>
-          <p:cNvSpPr/>
-          <p:nvPr/>
-        </p:nvSpPr>
-        <p:spPr>
-          <a:xfrm>
-            <a:off x="5298338" y="2373567"/>
-            <a:ext cx="3103778" cy="846519"/>
-          </a:xfrm>
-          <a:prstGeom prst="roundRect">
-            <a:avLst>
-              <a:gd name="adj" fmla="val 25000"/>
-            </a:avLst>
-          </a:prstGeom>
-          <a:solidFill>
-            <a:srgbClr val="FFFFFF"/>
-          </a:solidFill>
-          <a:ln w="16510">
-            <a:solidFill>
-              <a:srgbClr val="1C7293"/>
-            </a:solidFill>
-          </a:ln>
-          <a:effectLst/>
-        </p:spPr>
-        <p:txBody>
-          <a:bodyPr rtlCol="0" anchor="ctr"/>
-          <a:lstStyle/>
-          <a:p>
-            <a:pPr algn="ctr"/>
-          </a:p>
-        </p:txBody>
-      </p:sp>
-      <p:sp>
-        <p:nvSpPr>
-          <p:cNvPr id="17" name="TextBox 16"/>
-          <p:cNvSpPr txBox="1"/>
-          <p:nvPr/>
-        </p:nvSpPr>
-        <p:spPr>
-          <a:xfrm>
-            <a:off x="5380634" y="2419287"/>
-            <a:ext cx="2939186" cy="755079"/>
-          </a:xfrm>
-          <a:prstGeom prst="rect">
-            <a:avLst/>
-          </a:prstGeom>
-          <a:noFill/>
-        </p:spPr>
-        <p:txBody>
-          <a:bodyPr wrap="square" lIns="0" rIns="0" tIns="0" bIns="0" anchor="ctr">
-            <a:spAutoFit/>
-          </a:bodyPr>
-          <a:lstStyle/>
-          <a:p>
-            <a:pPr algn="ctr">
-              <a:lnSpc>
-                <a:spcPct val="110000"/>
-              </a:lnSpc>
-            </a:pPr>
-            <a:r>
-              <a:rPr sz="1350" b="0" i="0">
-                <a:solidFill>
-                  <a:srgbClr val="21295C"/>
-                </a:solidFill>
-                <a:latin typeface="Arial"/>
-              </a:rPr>
-              <a:t>обрушения разнообразия в опыте не наблюдается вовсе</a:t>
-            </a:r>
-          </a:p>
-        </p:txBody>
-      </p:sp>
-      <p:sp>
-        <p:nvSpPr>
-          <p:cNvPr id="18" name="Rounded Rectangle 17"/>
-          <p:cNvSpPr/>
-          <p:nvPr/>
-        </p:nvSpPr>
-        <p:spPr>
-          <a:xfrm>
-            <a:off x="8493556" y="2373567"/>
-            <a:ext cx="3103778" cy="846519"/>
-          </a:xfrm>
-          <a:prstGeom prst="roundRect">
-            <a:avLst>
-              <a:gd name="adj" fmla="val 25000"/>
-            </a:avLst>
-          </a:prstGeom>
-          <a:solidFill>
-            <a:srgbClr val="FFFFFF"/>
-          </a:solidFill>
-          <a:ln w="16510">
-            <a:solidFill>
-              <a:srgbClr val="1C7293"/>
-            </a:solidFill>
-          </a:ln>
-          <a:effectLst/>
-        </p:spPr>
-        <p:txBody>
-          <a:bodyPr rtlCol="0" anchor="ctr"/>
-          <a:lstStyle/>
-          <a:p>
-            <a:pPr algn="ctr"/>
-          </a:p>
-        </p:txBody>
-      </p:sp>
-      <p:sp>
-        <p:nvSpPr>
-          <p:cNvPr id="19" name="TextBox 18"/>
-          <p:cNvSpPr txBox="1"/>
-          <p:nvPr/>
-        </p:nvSpPr>
-        <p:spPr>
-          <a:xfrm>
-            <a:off x="8575852" y="2419287"/>
-            <a:ext cx="2939186" cy="755079"/>
-          </a:xfrm>
-          <a:prstGeom prst="rect">
-            <a:avLst/>
-          </a:prstGeom>
-          <a:noFill/>
-        </p:spPr>
-        <p:txBody>
-          <a:bodyPr wrap="square" lIns="0" rIns="0" tIns="0" bIns="0" anchor="ctr">
-            <a:spAutoFit/>
-          </a:bodyPr>
-          <a:lstStyle/>
-          <a:p>
-            <a:pPr algn="ctr">
-              <a:lnSpc>
-                <a:spcPct val="110000"/>
-              </a:lnSpc>
-            </a:pPr>
-            <a:r>
-              <a:rPr sz="1350" b="0" i="0">
-                <a:solidFill>
-                  <a:srgbClr val="21295C"/>
-                </a:solidFill>
-                <a:latin typeface="Arial"/>
-              </a:rPr>
-              <a:t>выше и производительность, и качество по всем измерениям сразу</a:t>
-            </a:r>
-          </a:p>
-        </p:txBody>
-      </p:sp>
-      <p:sp>
-        <p:nvSpPr>
-          <p:cNvPr id="20" name="TextBox 19"/>
-          <p:cNvSpPr txBox="1"/>
-          <p:nvPr/>
-        </p:nvSpPr>
-        <p:spPr>
-          <a:xfrm>
-            <a:off x="502920" y="3320671"/>
-            <a:ext cx="11185855" cy="215015"/>
-          </a:xfrm>
-          <a:prstGeom prst="rect">
-            <a:avLst/>
-          </a:prstGeom>
-          <a:noFill/>
-        </p:spPr>
-        <p:txBody>
-          <a:bodyPr wrap="square" lIns="0" rIns="0" tIns="0" bIns="0" anchor="t">
-            <a:spAutoFit/>
-          </a:bodyPr>
-          <a:lstStyle/>
-          <a:p>
-            <a:pPr algn="l">
-              <a:lnSpc>
-                <a:spcPct val="114000"/>
-              </a:lnSpc>
-            </a:pPr>
-            <a:r>
-              <a:rPr sz="1200" b="0" i="1">
-                <a:solidFill>
-                  <a:srgbClr val="1C7293"/>
-                </a:solidFill>
-                <a:latin typeface="Arial"/>
-              </a:rPr>
-              <a:t>Одно и то же удешевление пробы, два режима работы человека с моделью</a:t>
-            </a:r>
-          </a:p>
-        </p:txBody>
-      </p:sp>
-      <p:sp>
-        <p:nvSpPr>
-          <p:cNvPr id="21" name="Rounded Rectangle 20"/>
-          <p:cNvSpPr/>
-          <p:nvPr/>
-        </p:nvSpPr>
-        <p:spPr>
-          <a:xfrm>
-            <a:off x="374904" y="3627126"/>
-            <a:ext cx="11441887" cy="1551464"/>
-          </a:xfrm>
-          <a:prstGeom prst="roundRect">
-            <a:avLst>
-              <a:gd name="adj" fmla="val 19645"/>
             </a:avLst>
           </a:prstGeom>
           <a:solidFill>
@@ -4758,14 +6239,14 @@
       </p:sp>
       <p:sp>
         <p:nvSpPr>
-          <p:cNvPr id="22" name="TextBox 21"/>
+          <p:cNvPr id="5" name="TextBox 4"/>
           <p:cNvSpPr txBox="1"/>
           <p:nvPr/>
         </p:nvSpPr>
         <p:spPr>
           <a:xfrm>
-            <a:off x="539496" y="3718566"/>
-            <a:ext cx="11112703" cy="2517641"/>
+            <a:off x="539496" y="1335024"/>
+            <a:ext cx="11112703" cy="718978"/>
           </a:xfrm>
           <a:prstGeom prst="rect">
             <a:avLst/>
@@ -4790,73 +6271,2565 @@
                 </a:solidFill>
                 <a:latin typeface="Arial"/>
               </a:rPr>
-              <a:t>Режим выбирает человек. Это единственный рычаг на кадре.</a:t>
-            </a:r>
-            <a:r>
-              <a:rPr sz="1500" b="0" i="0">
+              <a:t>Дешевизна попытки и дороговизна выбора растут вместе: чем дороже единица выхода, тем больше проб приходится просеивать ради одной годной.</a:t>
+            </a:r>
+          </a:p>
+        </p:txBody>
+      </p:sp>
+      <p:sp>
+        <p:nvSpPr>
+          <p:cNvPr id="6" name="Rectangle 5"/>
+          <p:cNvSpPr/>
+          <p:nvPr/>
+        </p:nvSpPr>
+        <p:spPr>
+          <a:xfrm>
+            <a:off x="502920" y="2163730"/>
+            <a:ext cx="2788920" cy="323384"/>
+          </a:xfrm>
+          <a:prstGeom prst="rect">
+            <a:avLst/>
+          </a:prstGeom>
+          <a:solidFill>
+            <a:srgbClr val="21295C"/>
+          </a:solidFill>
+          <a:ln>
+            <a:noFill/>
+          </a:ln>
+          <a:effectLst/>
+        </p:spPr>
+        <p:txBody>
+          <a:bodyPr rtlCol="0" anchor="ctr"/>
+          <a:lstStyle/>
+          <a:p>
+            <a:pPr algn="ctr"/>
+          </a:p>
+        </p:txBody>
+      </p:sp>
+      <p:sp>
+        <p:nvSpPr>
+          <p:cNvPr id="7" name="TextBox 6"/>
+          <p:cNvSpPr txBox="1"/>
+          <p:nvPr/>
+        </p:nvSpPr>
+        <p:spPr>
+          <a:xfrm>
+            <a:off x="566928" y="2227738"/>
+            <a:ext cx="2660903" cy="195368"/>
+          </a:xfrm>
+          <a:prstGeom prst="rect">
+            <a:avLst/>
+          </a:prstGeom>
+          <a:noFill/>
+        </p:spPr>
+        <p:txBody>
+          <a:bodyPr wrap="square" lIns="0" rIns="0" tIns="0" bIns="0" anchor="t">
+            <a:spAutoFit/>
+          </a:bodyPr>
+          <a:lstStyle/>
+          <a:p>
+            <a:pPr algn="l">
+              <a:lnSpc>
+                <a:spcPct val="113000"/>
+              </a:lnSpc>
+            </a:pPr>
+            <a:r>
+              <a:rPr sz="1100" b="1" i="0">
+                <a:solidFill>
+                  <a:srgbClr val="FFFFFF"/>
+                </a:solidFill>
+                <a:latin typeface="Arial"/>
+              </a:rPr>
+              <a:t>Тип задачи</a:t>
+            </a:r>
+          </a:p>
+        </p:txBody>
+      </p:sp>
+      <p:sp>
+        <p:nvSpPr>
+          <p:cNvPr id="8" name="Rectangle 7"/>
+          <p:cNvSpPr/>
+          <p:nvPr/>
+        </p:nvSpPr>
+        <p:spPr>
+          <a:xfrm>
+            <a:off x="3291839" y="2163730"/>
+            <a:ext cx="1679387" cy="323384"/>
+          </a:xfrm>
+          <a:prstGeom prst="rect">
+            <a:avLst/>
+          </a:prstGeom>
+          <a:solidFill>
+            <a:srgbClr val="065A82"/>
+          </a:solidFill>
+          <a:ln>
+            <a:noFill/>
+          </a:ln>
+          <a:effectLst/>
+        </p:spPr>
+        <p:txBody>
+          <a:bodyPr rtlCol="0" anchor="ctr"/>
+          <a:lstStyle/>
+          <a:p>
+            <a:pPr algn="ctr"/>
+          </a:p>
+        </p:txBody>
+      </p:sp>
+      <p:sp>
+        <p:nvSpPr>
+          <p:cNvPr id="9" name="TextBox 8"/>
+          <p:cNvSpPr txBox="1"/>
+          <p:nvPr/>
+        </p:nvSpPr>
+        <p:spPr>
+          <a:xfrm>
+            <a:off x="3355847" y="2227738"/>
+            <a:ext cx="1551371" cy="195368"/>
+          </a:xfrm>
+          <a:prstGeom prst="rect">
+            <a:avLst/>
+          </a:prstGeom>
+          <a:noFill/>
+        </p:spPr>
+        <p:txBody>
+          <a:bodyPr wrap="square" lIns="0" rIns="0" tIns="0" bIns="0" anchor="t">
+            <a:spAutoFit/>
+          </a:bodyPr>
+          <a:lstStyle/>
+          <a:p>
+            <a:pPr algn="l">
+              <a:lnSpc>
+                <a:spcPct val="113000"/>
+              </a:lnSpc>
+            </a:pPr>
+            <a:r>
+              <a:rPr sz="1100" b="1" i="0">
+                <a:solidFill>
+                  <a:srgbClr val="FFFFFF"/>
+                </a:solidFill>
+                <a:latin typeface="Arial"/>
+              </a:rPr>
+              <a:t>Изображение</a:t>
+            </a:r>
+          </a:p>
+        </p:txBody>
+      </p:sp>
+      <p:sp>
+        <p:nvSpPr>
+          <p:cNvPr id="10" name="Rectangle 9"/>
+          <p:cNvSpPr/>
+          <p:nvPr/>
+        </p:nvSpPr>
+        <p:spPr>
+          <a:xfrm>
+            <a:off x="4971227" y="2163730"/>
+            <a:ext cx="1679387" cy="323384"/>
+          </a:xfrm>
+          <a:prstGeom prst="rect">
+            <a:avLst/>
+          </a:prstGeom>
+          <a:solidFill>
+            <a:srgbClr val="065A82"/>
+          </a:solidFill>
+          <a:ln>
+            <a:noFill/>
+          </a:ln>
+          <a:effectLst/>
+        </p:spPr>
+        <p:txBody>
+          <a:bodyPr rtlCol="0" anchor="ctr"/>
+          <a:lstStyle/>
+          <a:p>
+            <a:pPr algn="ctr"/>
+          </a:p>
+        </p:txBody>
+      </p:sp>
+      <p:sp>
+        <p:nvSpPr>
+          <p:cNvPr id="11" name="TextBox 10"/>
+          <p:cNvSpPr txBox="1"/>
+          <p:nvPr/>
+        </p:nvSpPr>
+        <p:spPr>
+          <a:xfrm>
+            <a:off x="5035235" y="2227738"/>
+            <a:ext cx="1551371" cy="195368"/>
+          </a:xfrm>
+          <a:prstGeom prst="rect">
+            <a:avLst/>
+          </a:prstGeom>
+          <a:noFill/>
+        </p:spPr>
+        <p:txBody>
+          <a:bodyPr wrap="square" lIns="0" rIns="0" tIns="0" bIns="0" anchor="t">
+            <a:spAutoFit/>
+          </a:bodyPr>
+          <a:lstStyle/>
+          <a:p>
+            <a:pPr algn="l">
+              <a:lnSpc>
+                <a:spcPct val="113000"/>
+              </a:lnSpc>
+            </a:pPr>
+            <a:r>
+              <a:rPr sz="1100" b="1" i="0">
+                <a:solidFill>
+                  <a:srgbClr val="FFFFFF"/>
+                </a:solidFill>
+                <a:latin typeface="Arial"/>
+              </a:rPr>
+              <a:t>Звук</a:t>
+            </a:r>
+          </a:p>
+        </p:txBody>
+      </p:sp>
+      <p:sp>
+        <p:nvSpPr>
+          <p:cNvPr id="12" name="Rectangle 11"/>
+          <p:cNvSpPr/>
+          <p:nvPr/>
+        </p:nvSpPr>
+        <p:spPr>
+          <a:xfrm>
+            <a:off x="6650614" y="2163730"/>
+            <a:ext cx="1679387" cy="323384"/>
+          </a:xfrm>
+          <a:prstGeom prst="rect">
+            <a:avLst/>
+          </a:prstGeom>
+          <a:solidFill>
+            <a:srgbClr val="065A82"/>
+          </a:solidFill>
+          <a:ln>
+            <a:noFill/>
+          </a:ln>
+          <a:effectLst/>
+        </p:spPr>
+        <p:txBody>
+          <a:bodyPr rtlCol="0" anchor="ctr"/>
+          <a:lstStyle/>
+          <a:p>
+            <a:pPr algn="ctr"/>
+          </a:p>
+        </p:txBody>
+      </p:sp>
+      <p:sp>
+        <p:nvSpPr>
+          <p:cNvPr id="13" name="TextBox 12"/>
+          <p:cNvSpPr txBox="1"/>
+          <p:nvPr/>
+        </p:nvSpPr>
+        <p:spPr>
+          <a:xfrm>
+            <a:off x="6714622" y="2227738"/>
+            <a:ext cx="1551371" cy="195368"/>
+          </a:xfrm>
+          <a:prstGeom prst="rect">
+            <a:avLst/>
+          </a:prstGeom>
+          <a:noFill/>
+        </p:spPr>
+        <p:txBody>
+          <a:bodyPr wrap="square" lIns="0" rIns="0" tIns="0" bIns="0" anchor="t">
+            <a:spAutoFit/>
+          </a:bodyPr>
+          <a:lstStyle/>
+          <a:p>
+            <a:pPr algn="l">
+              <a:lnSpc>
+                <a:spcPct val="113000"/>
+              </a:lnSpc>
+            </a:pPr>
+            <a:r>
+              <a:rPr sz="1100" b="1" i="0">
+                <a:solidFill>
+                  <a:srgbClr val="FFFFFF"/>
+                </a:solidFill>
+                <a:latin typeface="Arial"/>
+              </a:rPr>
+              <a:t>Видео</a:t>
+            </a:r>
+          </a:p>
+        </p:txBody>
+      </p:sp>
+      <p:sp>
+        <p:nvSpPr>
+          <p:cNvPr id="14" name="Rectangle 13"/>
+          <p:cNvSpPr/>
+          <p:nvPr/>
+        </p:nvSpPr>
+        <p:spPr>
+          <a:xfrm>
+            <a:off x="8330001" y="2163730"/>
+            <a:ext cx="1679387" cy="323384"/>
+          </a:xfrm>
+          <a:prstGeom prst="rect">
+            <a:avLst/>
+          </a:prstGeom>
+          <a:solidFill>
+            <a:srgbClr val="F4F7FA"/>
+          </a:solidFill>
+          <a:ln w="12700">
+            <a:solidFill>
+              <a:srgbClr val="D9E2EC"/>
+            </a:solidFill>
+          </a:ln>
+          <a:effectLst/>
+        </p:spPr>
+        <p:txBody>
+          <a:bodyPr rtlCol="0" anchor="ctr"/>
+          <a:lstStyle/>
+          <a:p>
+            <a:pPr algn="ctr"/>
+          </a:p>
+        </p:txBody>
+      </p:sp>
+      <p:sp>
+        <p:nvSpPr>
+          <p:cNvPr id="15" name="TextBox 14"/>
+          <p:cNvSpPr txBox="1"/>
+          <p:nvPr/>
+        </p:nvSpPr>
+        <p:spPr>
+          <a:xfrm>
+            <a:off x="8394009" y="2227738"/>
+            <a:ext cx="1551371" cy="195368"/>
+          </a:xfrm>
+          <a:prstGeom prst="rect">
+            <a:avLst/>
+          </a:prstGeom>
+          <a:noFill/>
+        </p:spPr>
+        <p:txBody>
+          <a:bodyPr wrap="square" lIns="0" rIns="0" tIns="0" bIns="0" anchor="t">
+            <a:spAutoFit/>
+          </a:bodyPr>
+          <a:lstStyle/>
+          <a:p>
+            <a:pPr algn="l">
+              <a:lnSpc>
+                <a:spcPct val="113000"/>
+              </a:lnSpc>
+            </a:pPr>
+            <a:r>
+              <a:rPr sz="1100" b="0" i="1">
+                <a:solidFill>
+                  <a:srgbClr val="1C7293"/>
+                </a:solidFill>
+                <a:latin typeface="Arial"/>
+              </a:rPr>
+              <a:t>Трёхмерное</a:t>
+            </a:r>
+          </a:p>
+        </p:txBody>
+      </p:sp>
+      <p:sp>
+        <p:nvSpPr>
+          <p:cNvPr id="16" name="Rectangle 15"/>
+          <p:cNvSpPr/>
+          <p:nvPr/>
+        </p:nvSpPr>
+        <p:spPr>
+          <a:xfrm>
+            <a:off x="10009388" y="2163730"/>
+            <a:ext cx="1679387" cy="323384"/>
+          </a:xfrm>
+          <a:prstGeom prst="rect">
+            <a:avLst/>
+          </a:prstGeom>
+          <a:solidFill>
+            <a:srgbClr val="F4F7FA"/>
+          </a:solidFill>
+          <a:ln w="12700">
+            <a:solidFill>
+              <a:srgbClr val="D9E2EC"/>
+            </a:solidFill>
+          </a:ln>
+          <a:effectLst/>
+        </p:spPr>
+        <p:txBody>
+          <a:bodyPr rtlCol="0" anchor="ctr"/>
+          <a:lstStyle/>
+          <a:p>
+            <a:pPr algn="ctr"/>
+          </a:p>
+        </p:txBody>
+      </p:sp>
+      <p:sp>
+        <p:nvSpPr>
+          <p:cNvPr id="17" name="TextBox 16"/>
+          <p:cNvSpPr txBox="1"/>
+          <p:nvPr/>
+        </p:nvSpPr>
+        <p:spPr>
+          <a:xfrm>
+            <a:off x="10073396" y="2227738"/>
+            <a:ext cx="1551371" cy="195368"/>
+          </a:xfrm>
+          <a:prstGeom prst="rect">
+            <a:avLst/>
+          </a:prstGeom>
+          <a:noFill/>
+        </p:spPr>
+        <p:txBody>
+          <a:bodyPr wrap="square" lIns="0" rIns="0" tIns="0" bIns="0" anchor="t">
+            <a:spAutoFit/>
+          </a:bodyPr>
+          <a:lstStyle/>
+          <a:p>
+            <a:pPr algn="l">
+              <a:lnSpc>
+                <a:spcPct val="113000"/>
+              </a:lnSpc>
+            </a:pPr>
+            <a:r>
+              <a:rPr sz="1100" b="0" i="1">
+                <a:solidFill>
+                  <a:srgbClr val="1C7293"/>
+                </a:solidFill>
+                <a:latin typeface="Arial"/>
+              </a:rPr>
+              <a:t>Распознавание</a:t>
+            </a:r>
+          </a:p>
+        </p:txBody>
+      </p:sp>
+      <p:sp>
+        <p:nvSpPr>
+          <p:cNvPr id="18" name="Rectangle 17"/>
+          <p:cNvSpPr/>
+          <p:nvPr/>
+        </p:nvSpPr>
+        <p:spPr>
+          <a:xfrm>
+            <a:off x="6650614" y="2436823"/>
+            <a:ext cx="1679387" cy="50292"/>
+          </a:xfrm>
+          <a:prstGeom prst="rect">
+            <a:avLst/>
+          </a:prstGeom>
+          <a:solidFill>
+            <a:srgbClr val="F0AB00"/>
+          </a:solidFill>
+          <a:ln>
+            <a:noFill/>
+          </a:ln>
+          <a:effectLst/>
+        </p:spPr>
+        <p:txBody>
+          <a:bodyPr rtlCol="0" anchor="ctr"/>
+          <a:lstStyle/>
+          <a:p>
+            <a:pPr algn="ctr"/>
+          </a:p>
+        </p:txBody>
+      </p:sp>
+      <p:sp>
+        <p:nvSpPr>
+          <p:cNvPr id="19" name="Rectangle 18"/>
+          <p:cNvSpPr/>
+          <p:nvPr/>
+        </p:nvSpPr>
+        <p:spPr>
+          <a:xfrm>
+            <a:off x="502920" y="2487115"/>
+            <a:ext cx="2788920" cy="518753"/>
+          </a:xfrm>
+          <a:prstGeom prst="rect">
+            <a:avLst/>
+          </a:prstGeom>
+          <a:solidFill>
+            <a:srgbClr val="FFFFFF"/>
+          </a:solidFill>
+          <a:ln w="9525">
+            <a:solidFill>
+              <a:srgbClr val="D9E2EC"/>
+            </a:solidFill>
+          </a:ln>
+          <a:effectLst/>
+        </p:spPr>
+        <p:txBody>
+          <a:bodyPr rtlCol="0" anchor="ctr"/>
+          <a:lstStyle/>
+          <a:p>
+            <a:pPr algn="ctr"/>
+          </a:p>
+        </p:txBody>
+      </p:sp>
+      <p:sp>
+        <p:nvSpPr>
+          <p:cNvPr id="20" name="TextBox 19"/>
+          <p:cNvSpPr txBox="1"/>
+          <p:nvPr/>
+        </p:nvSpPr>
+        <p:spPr>
+          <a:xfrm>
+            <a:off x="566928" y="2551123"/>
+            <a:ext cx="2660903" cy="390737"/>
+          </a:xfrm>
+          <a:prstGeom prst="rect">
+            <a:avLst/>
+          </a:prstGeom>
+          <a:noFill/>
+        </p:spPr>
+        <p:txBody>
+          <a:bodyPr wrap="square" lIns="0" rIns="0" tIns="0" bIns="0" anchor="t">
+            <a:spAutoFit/>
+          </a:bodyPr>
+          <a:lstStyle/>
+          <a:p>
+            <a:pPr algn="l">
+              <a:lnSpc>
+                <a:spcPct val="113000"/>
+              </a:lnSpc>
+            </a:pPr>
+            <a:r>
+              <a:rPr sz="1200" b="1" i="0">
                 <a:solidFill>
                   <a:srgbClr val="21295C"/>
                 </a:solidFill>
                 <a:latin typeface="Arial"/>
               </a:rPr>
-              <a:t> Первый режим называется делегированием, второй — задачно-ориентированным взаимодействием, и различает их не инструмент, а то, кто держит решение.</a:t>
-            </a:r>
-          </a:p>
+              <a:t>Породить первое приближение</a:t>
+            </a:r>
+          </a:p>
+        </p:txBody>
+      </p:sp>
+      <p:sp>
+        <p:nvSpPr>
+          <p:cNvPr id="21" name="Rectangle 20"/>
+          <p:cNvSpPr/>
+          <p:nvPr/>
+        </p:nvSpPr>
+        <p:spPr>
+          <a:xfrm>
+            <a:off x="3291839" y="2487115"/>
+            <a:ext cx="1679387" cy="518753"/>
+          </a:xfrm>
+          <a:prstGeom prst="rect">
+            <a:avLst/>
+          </a:prstGeom>
+          <a:solidFill>
+            <a:srgbClr val="FFFFFF"/>
+          </a:solidFill>
+          <a:ln w="9525">
+            <a:solidFill>
+              <a:srgbClr val="D9E2EC"/>
+            </a:solidFill>
+          </a:ln>
+          <a:effectLst/>
+        </p:spPr>
+        <p:txBody>
+          <a:bodyPr rtlCol="0" anchor="ctr"/>
+          <a:lstStyle/>
+          <a:p>
+            <a:pPr algn="ctr"/>
+          </a:p>
+        </p:txBody>
+      </p:sp>
+      <p:sp>
+        <p:nvSpPr>
+          <p:cNvPr id="22" name="TextBox 21"/>
+          <p:cNvSpPr txBox="1"/>
+          <p:nvPr/>
+        </p:nvSpPr>
+        <p:spPr>
+          <a:xfrm>
+            <a:off x="3355847" y="2551123"/>
+            <a:ext cx="1551371" cy="390737"/>
+          </a:xfrm>
+          <a:prstGeom prst="rect">
+            <a:avLst/>
+          </a:prstGeom>
+          <a:noFill/>
+        </p:spPr>
+        <p:txBody>
+          <a:bodyPr wrap="square" lIns="0" rIns="0" tIns="0" bIns="0" anchor="t">
+            <a:spAutoFit/>
+          </a:bodyPr>
+          <a:lstStyle/>
           <a:p>
             <a:pPr algn="l">
               <a:lnSpc>
-                <a:spcPct val="126000"/>
+                <a:spcPct val="113000"/>
               </a:lnSpc>
-              <a:spcBef>
-                <a:spcPts val="700"/>
-              </a:spcBef>
             </a:pPr>
             <a:r>
-              <a:rPr sz="1500" b="0" i="0">
+              <a:rPr sz="1100" b="0" i="0">
                 <a:solidFill>
                   <a:srgbClr val="21295C"/>
                 </a:solidFill>
                 <a:latin typeface="Arial"/>
               </a:rPr>
-              <a:t/>
-            </a:r>
-            <a:r>
-              <a:rPr sz="1500" b="1" i="0">
+              <a:t>0,034–0,05 $ за изображение</a:t>
+            </a:r>
+          </a:p>
+        </p:txBody>
+      </p:sp>
+      <p:sp>
+        <p:nvSpPr>
+          <p:cNvPr id="23" name="Rectangle 22"/>
+          <p:cNvSpPr/>
+          <p:nvPr/>
+        </p:nvSpPr>
+        <p:spPr>
+          <a:xfrm>
+            <a:off x="4971227" y="2487115"/>
+            <a:ext cx="1679387" cy="518753"/>
+          </a:xfrm>
+          <a:prstGeom prst="rect">
+            <a:avLst/>
+          </a:prstGeom>
+          <a:solidFill>
+            <a:srgbClr val="FFFFFF"/>
+          </a:solidFill>
+          <a:ln w="9525">
+            <a:solidFill>
+              <a:srgbClr val="D9E2EC"/>
+            </a:solidFill>
+          </a:ln>
+          <a:effectLst/>
+        </p:spPr>
+        <p:txBody>
+          <a:bodyPr rtlCol="0" anchor="ctr"/>
+          <a:lstStyle/>
+          <a:p>
+            <a:pPr algn="ctr"/>
+          </a:p>
+        </p:txBody>
+      </p:sp>
+      <p:sp>
+        <p:nvSpPr>
+          <p:cNvPr id="24" name="TextBox 23"/>
+          <p:cNvSpPr txBox="1"/>
+          <p:nvPr/>
+        </p:nvSpPr>
+        <p:spPr>
+          <a:xfrm>
+            <a:off x="5035235" y="2551123"/>
+            <a:ext cx="1551371" cy="390737"/>
+          </a:xfrm>
+          <a:prstGeom prst="rect">
+            <a:avLst/>
+          </a:prstGeom>
+          <a:noFill/>
+        </p:spPr>
+        <p:txBody>
+          <a:bodyPr wrap="square" lIns="0" rIns="0" tIns="0" bIns="0" anchor="t">
+            <a:spAutoFit/>
+          </a:bodyPr>
+          <a:lstStyle/>
+          <a:p>
+            <a:pPr algn="l">
+              <a:lnSpc>
+                <a:spcPct val="113000"/>
+              </a:lnSpc>
+            </a:pPr>
+            <a:r>
+              <a:rPr sz="1100" b="0" i="0">
                 <a:solidFill>
                   <a:srgbClr val="21295C"/>
                 </a:solidFill>
                 <a:latin typeface="Arial"/>
               </a:rPr>
-              <a:t>Мера разнообразия у авторов опыта такая:</a:t>
-            </a:r>
-            <a:r>
-              <a:rPr sz="1500" b="0" i="0">
+              <a:t>дубляж 0,03–0,072 $ за минуту</a:t>
+            </a:r>
+          </a:p>
+        </p:txBody>
+      </p:sp>
+      <p:sp>
+        <p:nvSpPr>
+          <p:cNvPr id="25" name="Rectangle 24"/>
+          <p:cNvSpPr/>
+          <p:nvPr/>
+        </p:nvSpPr>
+        <p:spPr>
+          <a:xfrm>
+            <a:off x="6650614" y="2487115"/>
+            <a:ext cx="1679387" cy="518753"/>
+          </a:xfrm>
+          <a:prstGeom prst="rect">
+            <a:avLst/>
+          </a:prstGeom>
+          <a:solidFill>
+            <a:srgbClr val="FFFFFF"/>
+          </a:solidFill>
+          <a:ln w="9525">
+            <a:solidFill>
+              <a:srgbClr val="D9E2EC"/>
+            </a:solidFill>
+          </a:ln>
+          <a:effectLst/>
+        </p:spPr>
+        <p:txBody>
+          <a:bodyPr rtlCol="0" anchor="ctr"/>
+          <a:lstStyle/>
+          <a:p>
+            <a:pPr algn="ctr"/>
+          </a:p>
+        </p:txBody>
+      </p:sp>
+      <p:sp>
+        <p:nvSpPr>
+          <p:cNvPr id="26" name="TextBox 25"/>
+          <p:cNvSpPr txBox="1"/>
+          <p:nvPr/>
+        </p:nvSpPr>
+        <p:spPr>
+          <a:xfrm>
+            <a:off x="6714622" y="2551123"/>
+            <a:ext cx="1551371" cy="390737"/>
+          </a:xfrm>
+          <a:prstGeom prst="rect">
+            <a:avLst/>
+          </a:prstGeom>
+          <a:noFill/>
+        </p:spPr>
+        <p:txBody>
+          <a:bodyPr wrap="square" lIns="0" rIns="0" tIns="0" bIns="0" anchor="t">
+            <a:spAutoFit/>
+          </a:bodyPr>
+          <a:lstStyle/>
+          <a:p>
+            <a:pPr algn="l">
+              <a:lnSpc>
+                <a:spcPct val="113000"/>
+              </a:lnSpc>
+            </a:pPr>
+            <a:r>
+              <a:rPr sz="1100" b="0" i="0">
                 <a:solidFill>
                   <a:srgbClr val="21295C"/>
                 </a:solidFill>
                 <a:latin typeface="Arial"/>
               </a:rPr>
-              <a:t> семьдесят тысяч вариантов из одной модели менее разнообразны, чем семьдесят вариантов от семидесяти разных людей.</a:t>
-            </a:r>
-          </a:p>
-        </p:txBody>
-      </p:sp>
-      <p:sp>
-        <p:nvSpPr>
-          <p:cNvPr id="23" name="Rectangle 22"/>
+              <a:t>цена выпуска ниже в 10–20 раз</a:t>
+            </a:r>
+          </a:p>
+        </p:txBody>
+      </p:sp>
+      <p:sp>
+        <p:nvSpPr>
+          <p:cNvPr id="27" name="Rectangle 26"/>
           <p:cNvSpPr/>
           <p:nvPr/>
         </p:nvSpPr>
         <p:spPr>
           <a:xfrm>
-            <a:off x="502920" y="786241"/>
-            <a:ext cx="960120" cy="50292"/>
-          </a:xfrm>
-          <a:prstGeom prst="rect">
-            <a:avLst/>
-          </a:prstGeom>
-          <a:solidFill>
-            <a:srgbClr val="F0AB00"/>
+            <a:off x="8330001" y="2487115"/>
+            <a:ext cx="1679387" cy="518753"/>
+          </a:xfrm>
+          <a:prstGeom prst="rect">
+            <a:avLst/>
+          </a:prstGeom>
+          <a:solidFill>
+            <a:srgbClr val="F4F7FA"/>
+          </a:solidFill>
+          <a:ln w="9525">
+            <a:solidFill>
+              <a:srgbClr val="D9E2EC"/>
+            </a:solidFill>
+          </a:ln>
+          <a:effectLst/>
+        </p:spPr>
+        <p:txBody>
+          <a:bodyPr rtlCol="0" anchor="ctr"/>
+          <a:lstStyle/>
+          <a:p>
+            <a:pPr algn="ctr"/>
+          </a:p>
+        </p:txBody>
+      </p:sp>
+      <p:sp>
+        <p:nvSpPr>
+          <p:cNvPr id="28" name="Rectangle 27"/>
+          <p:cNvSpPr/>
+          <p:nvPr/>
+        </p:nvSpPr>
+        <p:spPr>
+          <a:xfrm>
+            <a:off x="10009388" y="2487115"/>
+            <a:ext cx="1679387" cy="518753"/>
+          </a:xfrm>
+          <a:prstGeom prst="rect">
+            <a:avLst/>
+          </a:prstGeom>
+          <a:solidFill>
+            <a:srgbClr val="F4F7FA"/>
+          </a:solidFill>
+          <a:ln w="9525">
+            <a:solidFill>
+              <a:srgbClr val="D9E2EC"/>
+            </a:solidFill>
+          </a:ln>
+          <a:effectLst/>
+        </p:spPr>
+        <p:txBody>
+          <a:bodyPr rtlCol="0" anchor="ctr"/>
+          <a:lstStyle/>
+          <a:p>
+            <a:pPr algn="ctr"/>
+          </a:p>
+        </p:txBody>
+      </p:sp>
+      <p:sp>
+        <p:nvSpPr>
+          <p:cNvPr id="29" name="Rectangle 28"/>
+          <p:cNvSpPr/>
+          <p:nvPr/>
+        </p:nvSpPr>
+        <p:spPr>
+          <a:xfrm>
+            <a:off x="502920" y="3005869"/>
+            <a:ext cx="2788920" cy="554275"/>
+          </a:xfrm>
+          <a:prstGeom prst="rect">
+            <a:avLst/>
+          </a:prstGeom>
+          <a:solidFill>
+            <a:srgbClr val="F4F7FA"/>
+          </a:solidFill>
+          <a:ln w="9525">
+            <a:solidFill>
+              <a:srgbClr val="D9E2EC"/>
+            </a:solidFill>
+          </a:ln>
+          <a:effectLst/>
+        </p:spPr>
+        <p:txBody>
+          <a:bodyPr rtlCol="0" anchor="ctr"/>
+          <a:lstStyle/>
+          <a:p>
+            <a:pPr algn="ctr"/>
+          </a:p>
+        </p:txBody>
+      </p:sp>
+      <p:sp>
+        <p:nvSpPr>
+          <p:cNvPr id="30" name="TextBox 29"/>
+          <p:cNvSpPr txBox="1"/>
+          <p:nvPr/>
+        </p:nvSpPr>
+        <p:spPr>
+          <a:xfrm>
+            <a:off x="566928" y="3069877"/>
+            <a:ext cx="2660903" cy="426259"/>
+          </a:xfrm>
+          <a:prstGeom prst="rect">
+            <a:avLst/>
+          </a:prstGeom>
+          <a:noFill/>
+        </p:spPr>
+        <p:txBody>
+          <a:bodyPr wrap="square" lIns="0" rIns="0" tIns="0" bIns="0" anchor="t">
+            <a:spAutoFit/>
+          </a:bodyPr>
+          <a:lstStyle/>
+          <a:p>
+            <a:pPr algn="l">
+              <a:lnSpc>
+                <a:spcPct val="113000"/>
+              </a:lnSpc>
+            </a:pPr>
+            <a:r>
+              <a:rPr sz="1200" b="1" i="0">
+                <a:solidFill>
+                  <a:srgbClr val="21295C"/>
+                </a:solidFill>
+                <a:latin typeface="Arial"/>
+              </a:rPr>
+              <a:t>Довести до производственного качества</a:t>
+            </a:r>
+          </a:p>
+        </p:txBody>
+      </p:sp>
+      <p:sp>
+        <p:nvSpPr>
+          <p:cNvPr id="31" name="Rectangle 30"/>
+          <p:cNvSpPr/>
+          <p:nvPr/>
+        </p:nvSpPr>
+        <p:spPr>
+          <a:xfrm>
+            <a:off x="3291839" y="3005869"/>
+            <a:ext cx="1679387" cy="554275"/>
+          </a:xfrm>
+          <a:prstGeom prst="rect">
+            <a:avLst/>
+          </a:prstGeom>
+          <a:solidFill>
+            <a:srgbClr val="F4F7FA"/>
+          </a:solidFill>
+          <a:ln w="9525">
+            <a:solidFill>
+              <a:srgbClr val="D9E2EC"/>
+            </a:solidFill>
+          </a:ln>
+          <a:effectLst/>
+        </p:spPr>
+        <p:txBody>
+          <a:bodyPr rtlCol="0" anchor="ctr"/>
+          <a:lstStyle/>
+          <a:p>
+            <a:pPr algn="ctr"/>
+          </a:p>
+        </p:txBody>
+      </p:sp>
+      <p:sp>
+        <p:nvSpPr>
+          <p:cNvPr id="32" name="TextBox 31"/>
+          <p:cNvSpPr txBox="1"/>
+          <p:nvPr/>
+        </p:nvSpPr>
+        <p:spPr>
+          <a:xfrm>
+            <a:off x="3355847" y="3069877"/>
+            <a:ext cx="1551371" cy="426259"/>
+          </a:xfrm>
+          <a:prstGeom prst="rect">
+            <a:avLst/>
+          </a:prstGeom>
+          <a:noFill/>
+        </p:spPr>
+        <p:txBody>
+          <a:bodyPr wrap="square" lIns="0" rIns="0" tIns="0" bIns="0" anchor="t">
+            <a:spAutoFit/>
+          </a:bodyPr>
+          <a:lstStyle/>
+          <a:p>
+            <a:pPr algn="l">
+              <a:lnSpc>
+                <a:spcPct val="113000"/>
+              </a:lnSpc>
+            </a:pPr>
+            <a:r>
+              <a:rPr sz="1100" b="0" i="0">
+                <a:solidFill>
+                  <a:srgbClr val="21295C"/>
+                </a:solidFill>
+                <a:latin typeface="Arial"/>
+              </a:rPr>
+              <a:t>адаптеры и ручная правка</a:t>
+            </a:r>
+          </a:p>
+        </p:txBody>
+      </p:sp>
+      <p:sp>
+        <p:nvSpPr>
+          <p:cNvPr id="33" name="Rectangle 32"/>
+          <p:cNvSpPr/>
+          <p:nvPr/>
+        </p:nvSpPr>
+        <p:spPr>
+          <a:xfrm>
+            <a:off x="4971227" y="3005869"/>
+            <a:ext cx="1679387" cy="554275"/>
+          </a:xfrm>
+          <a:prstGeom prst="rect">
+            <a:avLst/>
+          </a:prstGeom>
+          <a:solidFill>
+            <a:srgbClr val="F4F7FA"/>
+          </a:solidFill>
+          <a:ln w="9525">
+            <a:solidFill>
+              <a:srgbClr val="D9E2EC"/>
+            </a:solidFill>
+          </a:ln>
+          <a:effectLst/>
+        </p:spPr>
+        <p:txBody>
+          <a:bodyPr rtlCol="0" anchor="ctr"/>
+          <a:lstStyle/>
+          <a:p>
+            <a:pPr algn="ctr"/>
+          </a:p>
+        </p:txBody>
+      </p:sp>
+      <p:sp>
+        <p:nvSpPr>
+          <p:cNvPr id="34" name="TextBox 33"/>
+          <p:cNvSpPr txBox="1"/>
+          <p:nvPr/>
+        </p:nvSpPr>
+        <p:spPr>
+          <a:xfrm>
+            <a:off x="5035235" y="3069877"/>
+            <a:ext cx="1551371" cy="426259"/>
+          </a:xfrm>
+          <a:prstGeom prst="rect">
+            <a:avLst/>
+          </a:prstGeom>
+          <a:noFill/>
+        </p:spPr>
+        <p:txBody>
+          <a:bodyPr wrap="square" lIns="0" rIns="0" tIns="0" bIns="0" anchor="t">
+            <a:spAutoFit/>
+          </a:bodyPr>
+          <a:lstStyle/>
+          <a:p>
+            <a:pPr algn="l">
+              <a:lnSpc>
+                <a:spcPct val="113000"/>
+              </a:lnSpc>
+            </a:pPr>
+            <a:r>
+              <a:rPr sz="1100" b="0" i="0">
+                <a:solidFill>
+                  <a:srgbClr val="21295C"/>
+                </a:solidFill>
+                <a:latin typeface="Arial"/>
+              </a:rPr>
+              <a:t>ручная правка дикции</a:t>
+            </a:r>
+          </a:p>
+        </p:txBody>
+      </p:sp>
+      <p:sp>
+        <p:nvSpPr>
+          <p:cNvPr id="35" name="Rectangle 34"/>
+          <p:cNvSpPr/>
+          <p:nvPr/>
+        </p:nvSpPr>
+        <p:spPr>
+          <a:xfrm>
+            <a:off x="6650614" y="3005869"/>
+            <a:ext cx="1679387" cy="554275"/>
+          </a:xfrm>
+          <a:prstGeom prst="rect">
+            <a:avLst/>
+          </a:prstGeom>
+          <a:solidFill>
+            <a:srgbClr val="F4F7FA"/>
+          </a:solidFill>
+          <a:ln w="9525">
+            <a:solidFill>
+              <a:srgbClr val="D9E2EC"/>
+            </a:solidFill>
+          </a:ln>
+          <a:effectLst/>
+        </p:spPr>
+        <p:txBody>
+          <a:bodyPr rtlCol="0" anchor="ctr"/>
+          <a:lstStyle/>
+          <a:p>
+            <a:pPr algn="ctr"/>
+          </a:p>
+        </p:txBody>
+      </p:sp>
+      <p:sp>
+        <p:nvSpPr>
+          <p:cNvPr id="36" name="TextBox 35"/>
+          <p:cNvSpPr txBox="1"/>
+          <p:nvPr/>
+        </p:nvSpPr>
+        <p:spPr>
+          <a:xfrm>
+            <a:off x="6714622" y="3069877"/>
+            <a:ext cx="1551371" cy="426259"/>
+          </a:xfrm>
+          <a:prstGeom prst="rect">
+            <a:avLst/>
+          </a:prstGeom>
+          <a:noFill/>
+        </p:spPr>
+        <p:txBody>
+          <a:bodyPr wrap="square" lIns="0" rIns="0" tIns="0" bIns="0" anchor="t">
+            <a:spAutoFit/>
+          </a:bodyPr>
+          <a:lstStyle/>
+          <a:p>
+            <a:pPr algn="l">
+              <a:lnSpc>
+                <a:spcPct val="113000"/>
+              </a:lnSpc>
+            </a:pPr>
+            <a:r>
+              <a:rPr sz="1100" b="0" i="0">
+                <a:solidFill>
+                  <a:srgbClr val="21295C"/>
+                </a:solidFill>
+                <a:latin typeface="Arial"/>
+              </a:rPr>
+              <a:t>ручной отбор и склейка</a:t>
+            </a:r>
+          </a:p>
+        </p:txBody>
+      </p:sp>
+      <p:sp>
+        <p:nvSpPr>
+          <p:cNvPr id="37" name="Rectangle 36"/>
+          <p:cNvSpPr/>
+          <p:nvPr/>
+        </p:nvSpPr>
+        <p:spPr>
+          <a:xfrm>
+            <a:off x="8330001" y="3005869"/>
+            <a:ext cx="1679387" cy="554275"/>
+          </a:xfrm>
+          <a:prstGeom prst="rect">
+            <a:avLst/>
+          </a:prstGeom>
+          <a:solidFill>
+            <a:srgbClr val="F4F7FA"/>
+          </a:solidFill>
+          <a:ln w="9525">
+            <a:solidFill>
+              <a:srgbClr val="D9E2EC"/>
+            </a:solidFill>
+          </a:ln>
+          <a:effectLst/>
+        </p:spPr>
+        <p:txBody>
+          <a:bodyPr rtlCol="0" anchor="ctr"/>
+          <a:lstStyle/>
+          <a:p>
+            <a:pPr algn="ctr"/>
+          </a:p>
+        </p:txBody>
+      </p:sp>
+      <p:sp>
+        <p:nvSpPr>
+          <p:cNvPr id="38" name="Rectangle 37"/>
+          <p:cNvSpPr/>
+          <p:nvPr/>
+        </p:nvSpPr>
+        <p:spPr>
+          <a:xfrm>
+            <a:off x="10009388" y="3005869"/>
+            <a:ext cx="1679387" cy="554275"/>
+          </a:xfrm>
+          <a:prstGeom prst="rect">
+            <a:avLst/>
+          </a:prstGeom>
+          <a:solidFill>
+            <a:srgbClr val="F4F7FA"/>
+          </a:solidFill>
+          <a:ln w="9525">
+            <a:solidFill>
+              <a:srgbClr val="D9E2EC"/>
+            </a:solidFill>
+          </a:ln>
+          <a:effectLst/>
+        </p:spPr>
+        <p:txBody>
+          <a:bodyPr rtlCol="0" anchor="ctr"/>
+          <a:lstStyle/>
+          <a:p>
+            <a:pPr algn="ctr"/>
+          </a:p>
+        </p:txBody>
+      </p:sp>
+      <p:sp>
+        <p:nvSpPr>
+          <p:cNvPr id="39" name="Rectangle 38"/>
+          <p:cNvSpPr/>
+          <p:nvPr/>
+        </p:nvSpPr>
+        <p:spPr>
+          <a:xfrm>
+            <a:off x="502920" y="3560144"/>
+            <a:ext cx="2788920" cy="518753"/>
+          </a:xfrm>
+          <a:prstGeom prst="rect">
+            <a:avLst/>
+          </a:prstGeom>
+          <a:solidFill>
+            <a:srgbClr val="FFFFFF"/>
+          </a:solidFill>
+          <a:ln w="9525">
+            <a:solidFill>
+              <a:srgbClr val="D9E2EC"/>
+            </a:solidFill>
+          </a:ln>
+          <a:effectLst/>
+        </p:spPr>
+        <p:txBody>
+          <a:bodyPr rtlCol="0" anchor="ctr"/>
+          <a:lstStyle/>
+          <a:p>
+            <a:pPr algn="ctr"/>
+          </a:p>
+        </p:txBody>
+      </p:sp>
+      <p:sp>
+        <p:nvSpPr>
+          <p:cNvPr id="40" name="TextBox 39"/>
+          <p:cNvSpPr txBox="1"/>
+          <p:nvPr/>
+        </p:nvSpPr>
+        <p:spPr>
+          <a:xfrm>
+            <a:off x="566928" y="3624152"/>
+            <a:ext cx="2660903" cy="390737"/>
+          </a:xfrm>
+          <a:prstGeom prst="rect">
+            <a:avLst/>
+          </a:prstGeom>
+          <a:noFill/>
+        </p:spPr>
+        <p:txBody>
+          <a:bodyPr wrap="square" lIns="0" rIns="0" tIns="0" bIns="0" anchor="t">
+            <a:spAutoFit/>
+          </a:bodyPr>
+          <a:lstStyle/>
+          <a:p>
+            <a:pPr algn="l">
+              <a:lnSpc>
+                <a:spcPct val="113000"/>
+              </a:lnSpc>
+            </a:pPr>
+            <a:r>
+              <a:rPr sz="1200" b="1" i="0">
+                <a:solidFill>
+                  <a:srgbClr val="21295C"/>
+                </a:solidFill>
+                <a:latin typeface="Arial"/>
+              </a:rPr>
+              <a:t>Восстановить существующее</a:t>
+            </a:r>
+          </a:p>
+        </p:txBody>
+      </p:sp>
+      <p:sp>
+        <p:nvSpPr>
+          <p:cNvPr id="41" name="Rectangle 40"/>
+          <p:cNvSpPr/>
+          <p:nvPr/>
+        </p:nvSpPr>
+        <p:spPr>
+          <a:xfrm>
+            <a:off x="3291839" y="3560144"/>
+            <a:ext cx="1679387" cy="518753"/>
+          </a:xfrm>
+          <a:prstGeom prst="rect">
+            <a:avLst/>
+          </a:prstGeom>
+          <a:solidFill>
+            <a:srgbClr val="FFFFFF"/>
+          </a:solidFill>
+          <a:ln w="9525">
+            <a:solidFill>
+              <a:srgbClr val="D9E2EC"/>
+            </a:solidFill>
+          </a:ln>
+          <a:effectLst/>
+        </p:spPr>
+        <p:txBody>
+          <a:bodyPr rtlCol="0" anchor="ctr"/>
+          <a:lstStyle/>
+          <a:p>
+            <a:pPr algn="ctr"/>
+          </a:p>
+        </p:txBody>
+      </p:sp>
+      <p:sp>
+        <p:nvSpPr>
+          <p:cNvPr id="42" name="TextBox 41"/>
+          <p:cNvSpPr txBox="1"/>
+          <p:nvPr/>
+        </p:nvSpPr>
+        <p:spPr>
+          <a:xfrm>
+            <a:off x="3355847" y="3624152"/>
+            <a:ext cx="1551371" cy="390737"/>
+          </a:xfrm>
+          <a:prstGeom prst="rect">
+            <a:avLst/>
+          </a:prstGeom>
+          <a:noFill/>
+        </p:spPr>
+        <p:txBody>
+          <a:bodyPr wrap="square" lIns="0" rIns="0" tIns="0" bIns="0" anchor="t">
+            <a:spAutoFit/>
+          </a:bodyPr>
+          <a:lstStyle/>
+          <a:p>
+            <a:pPr algn="l">
+              <a:lnSpc>
+                <a:spcPct val="113000"/>
+              </a:lnSpc>
+            </a:pPr>
+            <a:r>
+              <a:rPr sz="1100" b="0" i="0">
+                <a:solidFill>
+                  <a:srgbClr val="21295C"/>
+                </a:solidFill>
+                <a:latin typeface="Arial"/>
+              </a:rPr>
+              <a:t>повышение разрешения архива</a:t>
+            </a:r>
+          </a:p>
+        </p:txBody>
+      </p:sp>
+      <p:sp>
+        <p:nvSpPr>
+          <p:cNvPr id="43" name="Rectangle 42"/>
+          <p:cNvSpPr/>
+          <p:nvPr/>
+        </p:nvSpPr>
+        <p:spPr>
+          <a:xfrm>
+            <a:off x="4971227" y="3560144"/>
+            <a:ext cx="1679387" cy="518753"/>
+          </a:xfrm>
+          <a:prstGeom prst="rect">
+            <a:avLst/>
+          </a:prstGeom>
+          <a:solidFill>
+            <a:srgbClr val="FFFFFF"/>
+          </a:solidFill>
+          <a:ln w="9525">
+            <a:solidFill>
+              <a:srgbClr val="D9E2EC"/>
+            </a:solidFill>
+          </a:ln>
+          <a:effectLst/>
+        </p:spPr>
+        <p:txBody>
+          <a:bodyPr rtlCol="0" anchor="ctr"/>
+          <a:lstStyle/>
+          <a:p>
+            <a:pPr algn="ctr"/>
+          </a:p>
+        </p:txBody>
+      </p:sp>
+      <p:sp>
+        <p:nvSpPr>
+          <p:cNvPr id="44" name="TextBox 43"/>
+          <p:cNvSpPr txBox="1"/>
+          <p:nvPr/>
+        </p:nvSpPr>
+        <p:spPr>
+          <a:xfrm>
+            <a:off x="5035235" y="3624152"/>
+            <a:ext cx="1551371" cy="390737"/>
+          </a:xfrm>
+          <a:prstGeom prst="rect">
+            <a:avLst/>
+          </a:prstGeom>
+          <a:noFill/>
+        </p:spPr>
+        <p:txBody>
+          <a:bodyPr wrap="square" lIns="0" rIns="0" tIns="0" bIns="0" anchor="t">
+            <a:spAutoFit/>
+          </a:bodyPr>
+          <a:lstStyle/>
+          <a:p>
+            <a:pPr algn="l">
+              <a:lnSpc>
+                <a:spcPct val="113000"/>
+              </a:lnSpc>
+            </a:pPr>
+            <a:r>
+              <a:rPr sz="1100" b="0" i="0">
+                <a:solidFill>
+                  <a:srgbClr val="21295C"/>
+                </a:solidFill>
+                <a:latin typeface="Arial"/>
+              </a:rPr>
+              <a:t>разделение источников</a:t>
+            </a:r>
+          </a:p>
+        </p:txBody>
+      </p:sp>
+      <p:sp>
+        <p:nvSpPr>
+          <p:cNvPr id="45" name="Rectangle 44"/>
+          <p:cNvSpPr/>
+          <p:nvPr/>
+        </p:nvSpPr>
+        <p:spPr>
+          <a:xfrm>
+            <a:off x="6650614" y="3560144"/>
+            <a:ext cx="1679387" cy="518753"/>
+          </a:xfrm>
+          <a:prstGeom prst="rect">
+            <a:avLst/>
+          </a:prstGeom>
+          <a:solidFill>
+            <a:srgbClr val="FFFFFF"/>
+          </a:solidFill>
+          <a:ln w="9525">
+            <a:solidFill>
+              <a:srgbClr val="D9E2EC"/>
+            </a:solidFill>
+          </a:ln>
+          <a:effectLst/>
+        </p:spPr>
+        <p:txBody>
+          <a:bodyPr rtlCol="0" anchor="ctr"/>
+          <a:lstStyle/>
+          <a:p>
+            <a:pPr algn="ctr"/>
+          </a:p>
+        </p:txBody>
+      </p:sp>
+      <p:sp>
+        <p:nvSpPr>
+          <p:cNvPr id="46" name="TextBox 45"/>
+          <p:cNvSpPr txBox="1"/>
+          <p:nvPr/>
+        </p:nvSpPr>
+        <p:spPr>
+          <a:xfrm>
+            <a:off x="6714622" y="3624152"/>
+            <a:ext cx="1551371" cy="390737"/>
+          </a:xfrm>
+          <a:prstGeom prst="rect">
+            <a:avLst/>
+          </a:prstGeom>
+          <a:noFill/>
+        </p:spPr>
+        <p:txBody>
+          <a:bodyPr wrap="square" lIns="0" rIns="0" tIns="0" bIns="0" anchor="t">
+            <a:spAutoFit/>
+          </a:bodyPr>
+          <a:lstStyle/>
+          <a:p>
+            <a:pPr algn="l">
+              <a:lnSpc>
+                <a:spcPct val="113000"/>
+              </a:lnSpc>
+            </a:pPr>
+            <a:r>
+              <a:rPr sz="1100" b="0" i="0">
+                <a:solidFill>
+                  <a:srgbClr val="21295C"/>
+                </a:solidFill>
+                <a:latin typeface="Arial"/>
+              </a:rPr>
+              <a:t>интерполяция кадров</a:t>
+            </a:r>
+          </a:p>
+        </p:txBody>
+      </p:sp>
+      <p:sp>
+        <p:nvSpPr>
+          <p:cNvPr id="47" name="Rectangle 46"/>
+          <p:cNvSpPr/>
+          <p:nvPr/>
+        </p:nvSpPr>
+        <p:spPr>
+          <a:xfrm>
+            <a:off x="8330001" y="3560144"/>
+            <a:ext cx="1679387" cy="518753"/>
+          </a:xfrm>
+          <a:prstGeom prst="rect">
+            <a:avLst/>
+          </a:prstGeom>
+          <a:solidFill>
+            <a:srgbClr val="F4F7FA"/>
+          </a:solidFill>
+          <a:ln w="9525">
+            <a:solidFill>
+              <a:srgbClr val="D9E2EC"/>
+            </a:solidFill>
+          </a:ln>
+          <a:effectLst/>
+        </p:spPr>
+        <p:txBody>
+          <a:bodyPr rtlCol="0" anchor="ctr"/>
+          <a:lstStyle/>
+          <a:p>
+            <a:pPr algn="ctr"/>
+          </a:p>
+        </p:txBody>
+      </p:sp>
+      <p:sp>
+        <p:nvSpPr>
+          <p:cNvPr id="48" name="Rectangle 47"/>
+          <p:cNvSpPr/>
+          <p:nvPr/>
+        </p:nvSpPr>
+        <p:spPr>
+          <a:xfrm>
+            <a:off x="10009388" y="3560144"/>
+            <a:ext cx="1679387" cy="518753"/>
+          </a:xfrm>
+          <a:prstGeom prst="rect">
+            <a:avLst/>
+          </a:prstGeom>
+          <a:solidFill>
+            <a:srgbClr val="F4F7FA"/>
+          </a:solidFill>
+          <a:ln w="9525">
+            <a:solidFill>
+              <a:srgbClr val="D9E2EC"/>
+            </a:solidFill>
+          </a:ln>
+          <a:effectLst/>
+        </p:spPr>
+        <p:txBody>
+          <a:bodyPr rtlCol="0" anchor="ctr"/>
+          <a:lstStyle/>
+          <a:p>
+            <a:pPr algn="ctr"/>
+          </a:p>
+        </p:txBody>
+      </p:sp>
+      <p:sp>
+        <p:nvSpPr>
+          <p:cNvPr id="49" name="Rectangle 48"/>
+          <p:cNvSpPr/>
+          <p:nvPr/>
+        </p:nvSpPr>
+        <p:spPr>
+          <a:xfrm>
+            <a:off x="502920" y="4078897"/>
+            <a:ext cx="2788920" cy="518753"/>
+          </a:xfrm>
+          <a:prstGeom prst="rect">
+            <a:avLst/>
+          </a:prstGeom>
+          <a:solidFill>
+            <a:srgbClr val="F4F7FA"/>
+          </a:solidFill>
+          <a:ln w="9525">
+            <a:solidFill>
+              <a:srgbClr val="D9E2EC"/>
+            </a:solidFill>
+          </a:ln>
+          <a:effectLst/>
+        </p:spPr>
+        <p:txBody>
+          <a:bodyPr rtlCol="0" anchor="ctr"/>
+          <a:lstStyle/>
+          <a:p>
+            <a:pPr algn="ctr"/>
+          </a:p>
+        </p:txBody>
+      </p:sp>
+      <p:sp>
+        <p:nvSpPr>
+          <p:cNvPr id="50" name="TextBox 49"/>
+          <p:cNvSpPr txBox="1"/>
+          <p:nvPr/>
+        </p:nvSpPr>
+        <p:spPr>
+          <a:xfrm>
+            <a:off x="566928" y="4142905"/>
+            <a:ext cx="2660903" cy="390737"/>
+          </a:xfrm>
+          <a:prstGeom prst="rect">
+            <a:avLst/>
+          </a:prstGeom>
+          <a:noFill/>
+        </p:spPr>
+        <p:txBody>
+          <a:bodyPr wrap="square" lIns="0" rIns="0" tIns="0" bIns="0" anchor="t">
+            <a:spAutoFit/>
+          </a:bodyPr>
+          <a:lstStyle/>
+          <a:p>
+            <a:pPr algn="l">
+              <a:lnSpc>
+                <a:spcPct val="113000"/>
+              </a:lnSpc>
+            </a:pPr>
+            <a:r>
+              <a:rPr sz="1200" b="1" i="0">
+                <a:solidFill>
+                  <a:srgbClr val="21295C"/>
+                </a:solidFill>
+                <a:latin typeface="Arial"/>
+              </a:rPr>
+              <a:t>Соблюсти точные величины</a:t>
+            </a:r>
+          </a:p>
+        </p:txBody>
+      </p:sp>
+      <p:sp>
+        <p:nvSpPr>
+          <p:cNvPr id="51" name="Rectangle 50"/>
+          <p:cNvSpPr/>
+          <p:nvPr/>
+        </p:nvSpPr>
+        <p:spPr>
+          <a:xfrm>
+            <a:off x="3291839" y="4078897"/>
+            <a:ext cx="1679387" cy="518753"/>
+          </a:xfrm>
+          <a:prstGeom prst="rect">
+            <a:avLst/>
+          </a:prstGeom>
+          <a:solidFill>
+            <a:srgbClr val="F4F7FA"/>
+          </a:solidFill>
+          <a:ln w="9525">
+            <a:solidFill>
+              <a:srgbClr val="D9E2EC"/>
+            </a:solidFill>
+          </a:ln>
+          <a:effectLst/>
+        </p:spPr>
+        <p:txBody>
+          <a:bodyPr rtlCol="0" anchor="ctr"/>
+          <a:lstStyle/>
+          <a:p>
+            <a:pPr algn="ctr"/>
+          </a:p>
+        </p:txBody>
+      </p:sp>
+      <p:sp>
+        <p:nvSpPr>
+          <p:cNvPr id="52" name="TextBox 51"/>
+          <p:cNvSpPr txBox="1"/>
+          <p:nvPr/>
+        </p:nvSpPr>
+        <p:spPr>
+          <a:xfrm>
+            <a:off x="3355847" y="4142905"/>
+            <a:ext cx="1551371" cy="390737"/>
+          </a:xfrm>
+          <a:prstGeom prst="rect">
+            <a:avLst/>
+          </a:prstGeom>
+          <a:noFill/>
+        </p:spPr>
+        <p:txBody>
+          <a:bodyPr wrap="square" lIns="0" rIns="0" tIns="0" bIns="0" anchor="t">
+            <a:spAutoFit/>
+          </a:bodyPr>
+          <a:lstStyle/>
+          <a:p>
+            <a:pPr algn="l">
+              <a:lnSpc>
+                <a:spcPct val="113000"/>
+              </a:lnSpc>
+            </a:pPr>
+            <a:r>
+              <a:rPr sz="1100" b="0" i="0">
+                <a:solidFill>
+                  <a:srgbClr val="21295C"/>
+                </a:solidFill>
+                <a:latin typeface="Arial"/>
+              </a:rPr>
+              <a:t>нет: размеров в выдаче не существует</a:t>
+            </a:r>
+          </a:p>
+        </p:txBody>
+      </p:sp>
+      <p:sp>
+        <p:nvSpPr>
+          <p:cNvPr id="53" name="Rectangle 52"/>
+          <p:cNvSpPr/>
+          <p:nvPr/>
+        </p:nvSpPr>
+        <p:spPr>
+          <a:xfrm>
+            <a:off x="4971227" y="4078897"/>
+            <a:ext cx="1679387" cy="518753"/>
+          </a:xfrm>
+          <a:prstGeom prst="rect">
+            <a:avLst/>
+          </a:prstGeom>
+          <a:solidFill>
+            <a:srgbClr val="F4F7FA"/>
+          </a:solidFill>
+          <a:ln w="9525">
+            <a:solidFill>
+              <a:srgbClr val="D9E2EC"/>
+            </a:solidFill>
+          </a:ln>
+          <a:effectLst/>
+        </p:spPr>
+        <p:txBody>
+          <a:bodyPr rtlCol="0" anchor="ctr"/>
+          <a:lstStyle/>
+          <a:p>
+            <a:pPr algn="ctr"/>
+          </a:p>
+        </p:txBody>
+      </p:sp>
+      <p:sp>
+        <p:nvSpPr>
+          <p:cNvPr id="54" name="TextBox 53"/>
+          <p:cNvSpPr txBox="1"/>
+          <p:nvPr/>
+        </p:nvSpPr>
+        <p:spPr>
+          <a:xfrm>
+            <a:off x="5035235" y="4142905"/>
+            <a:ext cx="1551371" cy="390737"/>
+          </a:xfrm>
+          <a:prstGeom prst="rect">
+            <a:avLst/>
+          </a:prstGeom>
+          <a:noFill/>
+        </p:spPr>
+        <p:txBody>
+          <a:bodyPr wrap="square" lIns="0" rIns="0" tIns="0" bIns="0" anchor="t">
+            <a:spAutoFit/>
+          </a:bodyPr>
+          <a:lstStyle/>
+          <a:p>
+            <a:pPr algn="l">
+              <a:lnSpc>
+                <a:spcPct val="113000"/>
+              </a:lnSpc>
+            </a:pPr>
+            <a:r>
+              <a:rPr sz="1100" b="0" i="0">
+                <a:solidFill>
+                  <a:srgbClr val="21295C"/>
+                </a:solidFill>
+                <a:latin typeface="Arial"/>
+              </a:rPr>
+              <a:t>нет: длина задана до запуска</a:t>
+            </a:r>
+          </a:p>
+        </p:txBody>
+      </p:sp>
+      <p:sp>
+        <p:nvSpPr>
+          <p:cNvPr id="55" name="Rectangle 54"/>
+          <p:cNvSpPr/>
+          <p:nvPr/>
+        </p:nvSpPr>
+        <p:spPr>
+          <a:xfrm>
+            <a:off x="6650614" y="4078897"/>
+            <a:ext cx="1679387" cy="518753"/>
+          </a:xfrm>
+          <a:prstGeom prst="rect">
+            <a:avLst/>
+          </a:prstGeom>
+          <a:solidFill>
+            <a:srgbClr val="F4F7FA"/>
+          </a:solidFill>
+          <a:ln w="9525">
+            <a:solidFill>
+              <a:srgbClr val="D9E2EC"/>
+            </a:solidFill>
+          </a:ln>
+          <a:effectLst/>
+        </p:spPr>
+        <p:txBody>
+          <a:bodyPr rtlCol="0" anchor="ctr"/>
+          <a:lstStyle/>
+          <a:p>
+            <a:pPr algn="ctr"/>
+          </a:p>
+        </p:txBody>
+      </p:sp>
+      <p:sp>
+        <p:nvSpPr>
+          <p:cNvPr id="56" name="TextBox 55"/>
+          <p:cNvSpPr txBox="1"/>
+          <p:nvPr/>
+        </p:nvSpPr>
+        <p:spPr>
+          <a:xfrm>
+            <a:off x="6714622" y="4142905"/>
+            <a:ext cx="1551371" cy="390737"/>
+          </a:xfrm>
+          <a:prstGeom prst="rect">
+            <a:avLst/>
+          </a:prstGeom>
+          <a:noFill/>
+        </p:spPr>
+        <p:txBody>
+          <a:bodyPr wrap="square" lIns="0" rIns="0" tIns="0" bIns="0" anchor="t">
+            <a:spAutoFit/>
+          </a:bodyPr>
+          <a:lstStyle/>
+          <a:p>
+            <a:pPr algn="l">
+              <a:lnSpc>
+                <a:spcPct val="113000"/>
+              </a:lnSpc>
+            </a:pPr>
+            <a:r>
+              <a:rPr sz="1100" b="0" i="0">
+                <a:solidFill>
+                  <a:srgbClr val="21295C"/>
+                </a:solidFill>
+                <a:latin typeface="Arial"/>
+              </a:rPr>
+              <a:t>нет: физика выучена как корреляция</a:t>
+            </a:r>
+          </a:p>
+        </p:txBody>
+      </p:sp>
+      <p:sp>
+        <p:nvSpPr>
+          <p:cNvPr id="57" name="Rectangle 56"/>
+          <p:cNvSpPr/>
+          <p:nvPr/>
+        </p:nvSpPr>
+        <p:spPr>
+          <a:xfrm>
+            <a:off x="8330001" y="4078897"/>
+            <a:ext cx="1679387" cy="518753"/>
+          </a:xfrm>
+          <a:prstGeom prst="rect">
+            <a:avLst/>
+          </a:prstGeom>
+          <a:solidFill>
+            <a:srgbClr val="F4F7FA"/>
+          </a:solidFill>
+          <a:ln w="9525">
+            <a:solidFill>
+              <a:srgbClr val="D9E2EC"/>
+            </a:solidFill>
+          </a:ln>
+          <a:effectLst/>
+        </p:spPr>
+        <p:txBody>
+          <a:bodyPr rtlCol="0" anchor="ctr"/>
+          <a:lstStyle/>
+          <a:p>
+            <a:pPr algn="ctr"/>
+          </a:p>
+        </p:txBody>
+      </p:sp>
+      <p:sp>
+        <p:nvSpPr>
+          <p:cNvPr id="58" name="Rectangle 57"/>
+          <p:cNvSpPr/>
+          <p:nvPr/>
+        </p:nvSpPr>
+        <p:spPr>
+          <a:xfrm>
+            <a:off x="10009388" y="4078897"/>
+            <a:ext cx="1679387" cy="518753"/>
+          </a:xfrm>
+          <a:prstGeom prst="rect">
+            <a:avLst/>
+          </a:prstGeom>
+          <a:solidFill>
+            <a:srgbClr val="F4F7FA"/>
+          </a:solidFill>
+          <a:ln w="9525">
+            <a:solidFill>
+              <a:srgbClr val="D9E2EC"/>
+            </a:solidFill>
+          </a:ln>
+          <a:effectLst/>
+        </p:spPr>
+        <p:txBody>
+          <a:bodyPr rtlCol="0" anchor="ctr"/>
+          <a:lstStyle/>
+          <a:p>
+            <a:pPr algn="ctr"/>
+          </a:p>
+        </p:txBody>
+      </p:sp>
+      <p:sp>
+        <p:nvSpPr>
+          <p:cNvPr id="59" name="Rectangle 58"/>
+          <p:cNvSpPr/>
+          <p:nvPr/>
+        </p:nvSpPr>
+        <p:spPr>
+          <a:xfrm>
+            <a:off x="502920" y="4597651"/>
+            <a:ext cx="2788920" cy="714122"/>
+          </a:xfrm>
+          <a:prstGeom prst="rect">
+            <a:avLst/>
+          </a:prstGeom>
+          <a:solidFill>
+            <a:srgbClr val="FFFFFF"/>
+          </a:solidFill>
+          <a:ln w="9525">
+            <a:solidFill>
+              <a:srgbClr val="D9E2EC"/>
+            </a:solidFill>
+          </a:ln>
+          <a:effectLst/>
+        </p:spPr>
+        <p:txBody>
+          <a:bodyPr rtlCol="0" anchor="ctr"/>
+          <a:lstStyle/>
+          <a:p>
+            <a:pPr algn="ctr"/>
+          </a:p>
+        </p:txBody>
+      </p:sp>
+      <p:sp>
+        <p:nvSpPr>
+          <p:cNvPr id="60" name="TextBox 59"/>
+          <p:cNvSpPr txBox="1"/>
+          <p:nvPr/>
+        </p:nvSpPr>
+        <p:spPr>
+          <a:xfrm>
+            <a:off x="566928" y="4661659"/>
+            <a:ext cx="2660903" cy="586106"/>
+          </a:xfrm>
+          <a:prstGeom prst="rect">
+            <a:avLst/>
+          </a:prstGeom>
+          <a:noFill/>
+        </p:spPr>
+        <p:txBody>
+          <a:bodyPr wrap="square" lIns="0" rIns="0" tIns="0" bIns="0" anchor="t">
+            <a:spAutoFit/>
+          </a:bodyPr>
+          <a:lstStyle/>
+          <a:p>
+            <a:pPr algn="l">
+              <a:lnSpc>
+                <a:spcPct val="113000"/>
+              </a:lnSpc>
+            </a:pPr>
+            <a:r>
+              <a:rPr sz="1200" b="1" i="0">
+                <a:solidFill>
+                  <a:srgbClr val="21295C"/>
+                </a:solidFill>
+                <a:latin typeface="Arial"/>
+              </a:rPr>
+              <a:t>Уложиться в бюджет реального времени</a:t>
+            </a:r>
+          </a:p>
+        </p:txBody>
+      </p:sp>
+      <p:sp>
+        <p:nvSpPr>
+          <p:cNvPr id="61" name="Rectangle 60"/>
+          <p:cNvSpPr/>
+          <p:nvPr/>
+        </p:nvSpPr>
+        <p:spPr>
+          <a:xfrm>
+            <a:off x="3291839" y="4597651"/>
+            <a:ext cx="1679387" cy="714122"/>
+          </a:xfrm>
+          <a:prstGeom prst="rect">
+            <a:avLst/>
+          </a:prstGeom>
+          <a:solidFill>
+            <a:srgbClr val="FFFFFF"/>
+          </a:solidFill>
+          <a:ln w="9525">
+            <a:solidFill>
+              <a:srgbClr val="D9E2EC"/>
+            </a:solidFill>
+          </a:ln>
+          <a:effectLst/>
+        </p:spPr>
+        <p:txBody>
+          <a:bodyPr rtlCol="0" anchor="ctr"/>
+          <a:lstStyle/>
+          <a:p>
+            <a:pPr algn="ctr"/>
+          </a:p>
+        </p:txBody>
+      </p:sp>
+      <p:sp>
+        <p:nvSpPr>
+          <p:cNvPr id="62" name="TextBox 61"/>
+          <p:cNvSpPr txBox="1"/>
+          <p:nvPr/>
+        </p:nvSpPr>
+        <p:spPr>
+          <a:xfrm>
+            <a:off x="3355847" y="4661659"/>
+            <a:ext cx="1551371" cy="586106"/>
+          </a:xfrm>
+          <a:prstGeom prst="rect">
+            <a:avLst/>
+          </a:prstGeom>
+          <a:noFill/>
+        </p:spPr>
+        <p:txBody>
+          <a:bodyPr wrap="square" lIns="0" rIns="0" tIns="0" bIns="0" anchor="t">
+            <a:spAutoFit/>
+          </a:bodyPr>
+          <a:lstStyle/>
+          <a:p>
+            <a:pPr algn="l">
+              <a:lnSpc>
+                <a:spcPct val="113000"/>
+              </a:lnSpc>
+            </a:pPr>
+            <a:r>
+              <a:rPr sz="1100" b="0" i="0">
+                <a:solidFill>
+                  <a:srgbClr val="21295C"/>
+                </a:solidFill>
+                <a:latin typeface="Arial"/>
+              </a:rPr>
+              <a:t>неприменимо: кадрового бюджета у стадии нет</a:t>
+            </a:r>
+          </a:p>
+        </p:txBody>
+      </p:sp>
+      <p:sp>
+        <p:nvSpPr>
+          <p:cNvPr id="63" name="Rectangle 62"/>
+          <p:cNvSpPr/>
+          <p:nvPr/>
+        </p:nvSpPr>
+        <p:spPr>
+          <a:xfrm>
+            <a:off x="4971227" y="4597651"/>
+            <a:ext cx="1679387" cy="714122"/>
+          </a:xfrm>
+          <a:prstGeom prst="rect">
+            <a:avLst/>
+          </a:prstGeom>
+          <a:solidFill>
+            <a:srgbClr val="FFFFFF"/>
+          </a:solidFill>
+          <a:ln w="9525">
+            <a:solidFill>
+              <a:srgbClr val="D9E2EC"/>
+            </a:solidFill>
+          </a:ln>
+          <a:effectLst/>
+        </p:spPr>
+        <p:txBody>
+          <a:bodyPr rtlCol="0" anchor="ctr"/>
+          <a:lstStyle/>
+          <a:p>
+            <a:pPr algn="ctr"/>
+          </a:p>
+        </p:txBody>
+      </p:sp>
+      <p:sp>
+        <p:nvSpPr>
+          <p:cNvPr id="64" name="TextBox 63"/>
+          <p:cNvSpPr txBox="1"/>
+          <p:nvPr/>
+        </p:nvSpPr>
+        <p:spPr>
+          <a:xfrm>
+            <a:off x="5035235" y="4661659"/>
+            <a:ext cx="1551371" cy="586106"/>
+          </a:xfrm>
+          <a:prstGeom prst="rect">
+            <a:avLst/>
+          </a:prstGeom>
+          <a:noFill/>
+        </p:spPr>
+        <p:txBody>
+          <a:bodyPr wrap="square" lIns="0" rIns="0" tIns="0" bIns="0" anchor="t">
+            <a:spAutoFit/>
+          </a:bodyPr>
+          <a:lstStyle/>
+          <a:p>
+            <a:pPr algn="l">
+              <a:lnSpc>
+                <a:spcPct val="113000"/>
+              </a:lnSpc>
+            </a:pPr>
+            <a:r>
+              <a:rPr sz="1100" b="0" i="0">
+                <a:solidFill>
+                  <a:srgbClr val="21295C"/>
+                </a:solidFill>
+                <a:latin typeface="Arial"/>
+              </a:rPr>
+              <a:t>неприменимо: кадрового бюджета у стадии нет</a:t>
+            </a:r>
+          </a:p>
+        </p:txBody>
+      </p:sp>
+      <p:sp>
+        <p:nvSpPr>
+          <p:cNvPr id="65" name="Rectangle 64"/>
+          <p:cNvSpPr/>
+          <p:nvPr/>
+        </p:nvSpPr>
+        <p:spPr>
+          <a:xfrm>
+            <a:off x="6650614" y="4597651"/>
+            <a:ext cx="1679387" cy="714122"/>
+          </a:xfrm>
+          <a:prstGeom prst="rect">
+            <a:avLst/>
+          </a:prstGeom>
+          <a:solidFill>
+            <a:srgbClr val="FFFFFF"/>
+          </a:solidFill>
+          <a:ln w="9525">
+            <a:solidFill>
+              <a:srgbClr val="D9E2EC"/>
+            </a:solidFill>
+          </a:ln>
+          <a:effectLst/>
+        </p:spPr>
+        <p:txBody>
+          <a:bodyPr rtlCol="0" anchor="ctr"/>
+          <a:lstStyle/>
+          <a:p>
+            <a:pPr algn="ctr"/>
+          </a:p>
+        </p:txBody>
+      </p:sp>
+      <p:sp>
+        <p:nvSpPr>
+          <p:cNvPr id="66" name="TextBox 65"/>
+          <p:cNvSpPr txBox="1"/>
+          <p:nvPr/>
+        </p:nvSpPr>
+        <p:spPr>
+          <a:xfrm>
+            <a:off x="6714622" y="4661659"/>
+            <a:ext cx="1551371" cy="586106"/>
+          </a:xfrm>
+          <a:prstGeom prst="rect">
+            <a:avLst/>
+          </a:prstGeom>
+          <a:noFill/>
+        </p:spPr>
+        <p:txBody>
+          <a:bodyPr wrap="square" lIns="0" rIns="0" tIns="0" bIns="0" anchor="t">
+            <a:spAutoFit/>
+          </a:bodyPr>
+          <a:lstStyle/>
+          <a:p>
+            <a:pPr algn="l">
+              <a:lnSpc>
+                <a:spcPct val="113000"/>
+              </a:lnSpc>
+            </a:pPr>
+            <a:r>
+              <a:rPr sz="1100" b="0" i="0">
+                <a:solidFill>
+                  <a:srgbClr val="21295C"/>
+                </a:solidFill>
+                <a:latin typeface="Arial"/>
+              </a:rPr>
+              <a:t>нет: в кадровый бюджет не укладывается</a:t>
+            </a:r>
+          </a:p>
+        </p:txBody>
+      </p:sp>
+      <p:sp>
+        <p:nvSpPr>
+          <p:cNvPr id="67" name="Rectangle 66"/>
+          <p:cNvSpPr/>
+          <p:nvPr/>
+        </p:nvSpPr>
+        <p:spPr>
+          <a:xfrm>
+            <a:off x="8330001" y="4597651"/>
+            <a:ext cx="1679387" cy="714122"/>
+          </a:xfrm>
+          <a:prstGeom prst="rect">
+            <a:avLst/>
+          </a:prstGeom>
+          <a:solidFill>
+            <a:srgbClr val="F4F7FA"/>
+          </a:solidFill>
+          <a:ln w="9525">
+            <a:solidFill>
+              <a:srgbClr val="D9E2EC"/>
+            </a:solidFill>
+          </a:ln>
+          <a:effectLst/>
+        </p:spPr>
+        <p:txBody>
+          <a:bodyPr rtlCol="0" anchor="ctr"/>
+          <a:lstStyle/>
+          <a:p>
+            <a:pPr algn="ctr"/>
+          </a:p>
+        </p:txBody>
+      </p:sp>
+      <p:sp>
+        <p:nvSpPr>
+          <p:cNvPr id="68" name="Rectangle 67"/>
+          <p:cNvSpPr/>
+          <p:nvPr/>
+        </p:nvSpPr>
+        <p:spPr>
+          <a:xfrm>
+            <a:off x="10009388" y="4597651"/>
+            <a:ext cx="1679387" cy="714122"/>
+          </a:xfrm>
+          <a:prstGeom prst="rect">
+            <a:avLst/>
+          </a:prstGeom>
+          <a:solidFill>
+            <a:srgbClr val="F4F7FA"/>
+          </a:solidFill>
+          <a:ln w="9525">
+            <a:solidFill>
+              <a:srgbClr val="D9E2EC"/>
+            </a:solidFill>
+          </a:ln>
+          <a:effectLst/>
+        </p:spPr>
+        <p:txBody>
+          <a:bodyPr rtlCol="0" anchor="ctr"/>
+          <a:lstStyle/>
+          <a:p>
+            <a:pPr algn="ctr"/>
+          </a:p>
+        </p:txBody>
+      </p:sp>
+      <p:sp>
+        <p:nvSpPr>
+          <p:cNvPr id="69" name="Rectangle 68"/>
+          <p:cNvSpPr/>
+          <p:nvPr/>
+        </p:nvSpPr>
+        <p:spPr>
+          <a:xfrm>
+            <a:off x="502920" y="5311773"/>
+            <a:ext cx="2788920" cy="518753"/>
+          </a:xfrm>
+          <a:prstGeom prst="rect">
+            <a:avLst/>
+          </a:prstGeom>
+          <a:solidFill>
+            <a:srgbClr val="F4F7FA"/>
+          </a:solidFill>
+          <a:ln w="9525">
+            <a:solidFill>
+              <a:srgbClr val="D9E2EC"/>
+            </a:solidFill>
+          </a:ln>
+          <a:effectLst/>
+        </p:spPr>
+        <p:txBody>
+          <a:bodyPr rtlCol="0" anchor="ctr"/>
+          <a:lstStyle/>
+          <a:p>
+            <a:pPr algn="ctr"/>
+          </a:p>
+        </p:txBody>
+      </p:sp>
+      <p:sp>
+        <p:nvSpPr>
+          <p:cNvPr id="70" name="TextBox 69"/>
+          <p:cNvSpPr txBox="1"/>
+          <p:nvPr/>
+        </p:nvSpPr>
+        <p:spPr>
+          <a:xfrm>
+            <a:off x="566928" y="5375781"/>
+            <a:ext cx="2660903" cy="390737"/>
+          </a:xfrm>
+          <a:prstGeom prst="rect">
+            <a:avLst/>
+          </a:prstGeom>
+          <a:noFill/>
+        </p:spPr>
+        <p:txBody>
+          <a:bodyPr wrap="square" lIns="0" rIns="0" tIns="0" bIns="0" anchor="t">
+            <a:spAutoFit/>
+          </a:bodyPr>
+          <a:lstStyle/>
+          <a:p>
+            <a:pPr algn="l">
+              <a:lnSpc>
+                <a:spcPct val="113000"/>
+              </a:lnSpc>
+            </a:pPr>
+            <a:r>
+              <a:rPr sz="1200" b="1" i="0">
+                <a:solidFill>
+                  <a:srgbClr val="21295C"/>
+                </a:solidFill>
+                <a:latin typeface="Arial"/>
+              </a:rPr>
+              <a:t>Ответить «кто отвечает»</a:t>
+            </a:r>
+          </a:p>
+        </p:txBody>
+      </p:sp>
+      <p:sp>
+        <p:nvSpPr>
+          <p:cNvPr id="71" name="Rectangle 70"/>
+          <p:cNvSpPr/>
+          <p:nvPr/>
+        </p:nvSpPr>
+        <p:spPr>
+          <a:xfrm>
+            <a:off x="3291839" y="5311773"/>
+            <a:ext cx="1679387" cy="518753"/>
+          </a:xfrm>
+          <a:prstGeom prst="rect">
+            <a:avLst/>
+          </a:prstGeom>
+          <a:solidFill>
+            <a:srgbClr val="F4F7FA"/>
+          </a:solidFill>
+          <a:ln w="9525">
+            <a:solidFill>
+              <a:srgbClr val="D9E2EC"/>
+            </a:solidFill>
+          </a:ln>
+          <a:effectLst/>
+        </p:spPr>
+        <p:txBody>
+          <a:bodyPr rtlCol="0" anchor="ctr"/>
+          <a:lstStyle/>
+          <a:p>
+            <a:pPr algn="ctr"/>
+          </a:p>
+        </p:txBody>
+      </p:sp>
+      <p:sp>
+        <p:nvSpPr>
+          <p:cNvPr id="72" name="TextBox 71"/>
+          <p:cNvSpPr txBox="1"/>
+          <p:nvPr/>
+        </p:nvSpPr>
+        <p:spPr>
+          <a:xfrm>
+            <a:off x="3355847" y="5375781"/>
+            <a:ext cx="1551371" cy="390737"/>
+          </a:xfrm>
+          <a:prstGeom prst="rect">
+            <a:avLst/>
+          </a:prstGeom>
+          <a:noFill/>
+        </p:spPr>
+        <p:txBody>
+          <a:bodyPr wrap="square" lIns="0" rIns="0" tIns="0" bIns="0" anchor="t">
+            <a:spAutoFit/>
+          </a:bodyPr>
+          <a:lstStyle/>
+          <a:p>
+            <a:pPr algn="l">
+              <a:lnSpc>
+                <a:spcPct val="113000"/>
+              </a:lnSpc>
+            </a:pPr>
+            <a:r>
+              <a:rPr sz="1100" b="0" i="0">
+                <a:solidFill>
+                  <a:srgbClr val="21295C"/>
+                </a:solidFill>
+                <a:latin typeface="Arial"/>
+              </a:rPr>
+              <a:t>нет: источник детали не записан</a:t>
+            </a:r>
+          </a:p>
+        </p:txBody>
+      </p:sp>
+      <p:sp>
+        <p:nvSpPr>
+          <p:cNvPr id="73" name="Rectangle 72"/>
+          <p:cNvSpPr/>
+          <p:nvPr/>
+        </p:nvSpPr>
+        <p:spPr>
+          <a:xfrm>
+            <a:off x="4971227" y="5311773"/>
+            <a:ext cx="1679387" cy="518753"/>
+          </a:xfrm>
+          <a:prstGeom prst="rect">
+            <a:avLst/>
+          </a:prstGeom>
+          <a:solidFill>
+            <a:srgbClr val="F4F7FA"/>
+          </a:solidFill>
+          <a:ln w="9525">
+            <a:solidFill>
+              <a:srgbClr val="D9E2EC"/>
+            </a:solidFill>
+          </a:ln>
+          <a:effectLst/>
+        </p:spPr>
+        <p:txBody>
+          <a:bodyPr rtlCol="0" anchor="ctr"/>
+          <a:lstStyle/>
+          <a:p>
+            <a:pPr algn="ctr"/>
+          </a:p>
+        </p:txBody>
+      </p:sp>
+      <p:sp>
+        <p:nvSpPr>
+          <p:cNvPr id="74" name="TextBox 73"/>
+          <p:cNvSpPr txBox="1"/>
+          <p:nvPr/>
+        </p:nvSpPr>
+        <p:spPr>
+          <a:xfrm>
+            <a:off x="5035235" y="5375781"/>
+            <a:ext cx="1551371" cy="390737"/>
+          </a:xfrm>
+          <a:prstGeom prst="rect">
+            <a:avLst/>
+          </a:prstGeom>
+          <a:noFill/>
+        </p:spPr>
+        <p:txBody>
+          <a:bodyPr wrap="square" lIns="0" rIns="0" tIns="0" bIns="0" anchor="t">
+            <a:spAutoFit/>
+          </a:bodyPr>
+          <a:lstStyle/>
+          <a:p>
+            <a:pPr algn="l">
+              <a:lnSpc>
+                <a:spcPct val="113000"/>
+              </a:lnSpc>
+            </a:pPr>
+            <a:r>
+              <a:rPr sz="1100" b="0" i="0">
+                <a:solidFill>
+                  <a:srgbClr val="21295C"/>
+                </a:solidFill>
+                <a:latin typeface="Arial"/>
+              </a:rPr>
+              <a:t>нет: источник детали не записан</a:t>
+            </a:r>
+          </a:p>
+        </p:txBody>
+      </p:sp>
+      <p:sp>
+        <p:nvSpPr>
+          <p:cNvPr id="75" name="Rectangle 74"/>
+          <p:cNvSpPr/>
+          <p:nvPr/>
+        </p:nvSpPr>
+        <p:spPr>
+          <a:xfrm>
+            <a:off x="6650614" y="5311773"/>
+            <a:ext cx="1679387" cy="518753"/>
+          </a:xfrm>
+          <a:prstGeom prst="rect">
+            <a:avLst/>
+          </a:prstGeom>
+          <a:solidFill>
+            <a:srgbClr val="F4F7FA"/>
+          </a:solidFill>
+          <a:ln w="9525">
+            <a:solidFill>
+              <a:srgbClr val="D9E2EC"/>
+            </a:solidFill>
+          </a:ln>
+          <a:effectLst/>
+        </p:spPr>
+        <p:txBody>
+          <a:bodyPr rtlCol="0" anchor="ctr"/>
+          <a:lstStyle/>
+          <a:p>
+            <a:pPr algn="ctr"/>
+          </a:p>
+        </p:txBody>
+      </p:sp>
+      <p:sp>
+        <p:nvSpPr>
+          <p:cNvPr id="76" name="TextBox 75"/>
+          <p:cNvSpPr txBox="1"/>
+          <p:nvPr/>
+        </p:nvSpPr>
+        <p:spPr>
+          <a:xfrm>
+            <a:off x="6714622" y="5375781"/>
+            <a:ext cx="1551371" cy="390737"/>
+          </a:xfrm>
+          <a:prstGeom prst="rect">
+            <a:avLst/>
+          </a:prstGeom>
+          <a:noFill/>
+        </p:spPr>
+        <p:txBody>
+          <a:bodyPr wrap="square" lIns="0" rIns="0" tIns="0" bIns="0" anchor="t">
+            <a:spAutoFit/>
+          </a:bodyPr>
+          <a:lstStyle/>
+          <a:p>
+            <a:pPr algn="l">
+              <a:lnSpc>
+                <a:spcPct val="113000"/>
+              </a:lnSpc>
+            </a:pPr>
+            <a:r>
+              <a:rPr sz="1100" b="0" i="0">
+                <a:solidFill>
+                  <a:srgbClr val="21295C"/>
+                </a:solidFill>
+                <a:latin typeface="Arial"/>
+              </a:rPr>
+              <a:t>нет: источник детали не записан</a:t>
+            </a:r>
+          </a:p>
+        </p:txBody>
+      </p:sp>
+      <p:sp>
+        <p:nvSpPr>
+          <p:cNvPr id="77" name="Rectangle 76"/>
+          <p:cNvSpPr/>
+          <p:nvPr/>
+        </p:nvSpPr>
+        <p:spPr>
+          <a:xfrm>
+            <a:off x="8330001" y="5311773"/>
+            <a:ext cx="1679387" cy="518753"/>
+          </a:xfrm>
+          <a:prstGeom prst="rect">
+            <a:avLst/>
+          </a:prstGeom>
+          <a:solidFill>
+            <a:srgbClr val="F4F7FA"/>
+          </a:solidFill>
+          <a:ln w="9525">
+            <a:solidFill>
+              <a:srgbClr val="D9E2EC"/>
+            </a:solidFill>
+          </a:ln>
+          <a:effectLst/>
+        </p:spPr>
+        <p:txBody>
+          <a:bodyPr rtlCol="0" anchor="ctr"/>
+          <a:lstStyle/>
+          <a:p>
+            <a:pPr algn="ctr"/>
+          </a:p>
+        </p:txBody>
+      </p:sp>
+      <p:sp>
+        <p:nvSpPr>
+          <p:cNvPr id="78" name="Rectangle 77"/>
+          <p:cNvSpPr/>
+          <p:nvPr/>
+        </p:nvSpPr>
+        <p:spPr>
+          <a:xfrm>
+            <a:off x="10009388" y="5311773"/>
+            <a:ext cx="1679387" cy="518753"/>
+          </a:xfrm>
+          <a:prstGeom prst="rect">
+            <a:avLst/>
+          </a:prstGeom>
+          <a:solidFill>
+            <a:srgbClr val="F4F7FA"/>
+          </a:solidFill>
+          <a:ln w="9525">
+            <a:solidFill>
+              <a:srgbClr val="D9E2EC"/>
+            </a:solidFill>
+          </a:ln>
+          <a:effectLst/>
+        </p:spPr>
+        <p:txBody>
+          <a:bodyPr rtlCol="0" anchor="ctr"/>
+          <a:lstStyle/>
+          <a:p>
+            <a:pPr algn="ctr"/>
+          </a:p>
+        </p:txBody>
+      </p:sp>
+      <p:sp>
+        <p:nvSpPr>
+          <p:cNvPr id="79" name="Rounded Rectangle 78"/>
+          <p:cNvSpPr/>
+          <p:nvPr/>
+        </p:nvSpPr>
+        <p:spPr>
+          <a:xfrm>
+            <a:off x="502920" y="5912823"/>
+            <a:ext cx="11185855" cy="323384"/>
+          </a:xfrm>
+          <a:prstGeom prst="roundRect">
+            <a:avLst>
+              <a:gd name="adj" fmla="val 14000"/>
+            </a:avLst>
+          </a:prstGeom>
+          <a:solidFill>
+            <a:srgbClr val="FEF5E0"/>
           </a:solidFill>
           <a:ln>
             <a:noFill/>
@@ -4873,14 +8846,44 @@
       </p:sp>
       <p:sp>
         <p:nvSpPr>
-          <p:cNvPr id="24" name="TextBox 23"/>
+          <p:cNvPr id="80" name="Rectangle 79"/>
+          <p:cNvSpPr/>
+          <p:nvPr/>
+        </p:nvSpPr>
+        <p:spPr>
+          <a:xfrm>
+            <a:off x="502920" y="5912823"/>
+            <a:ext cx="68580" cy="323384"/>
+          </a:xfrm>
+          <a:prstGeom prst="rect">
+            <a:avLst/>
+          </a:prstGeom>
+          <a:solidFill>
+            <a:srgbClr val="F0AB00"/>
+          </a:solidFill>
+          <a:ln>
+            <a:noFill/>
+          </a:ln>
+          <a:effectLst/>
+        </p:spPr>
+        <p:txBody>
+          <a:bodyPr rtlCol="0" anchor="ctr"/>
+          <a:lstStyle/>
+          <a:p>
+            <a:pPr algn="ctr"/>
+          </a:p>
+        </p:txBody>
+      </p:sp>
+      <p:sp>
+        <p:nvSpPr>
+          <p:cNvPr id="81" name="TextBox 80"/>
           <p:cNvSpPr txBox="1"/>
           <p:nvPr/>
         </p:nvSpPr>
         <p:spPr>
           <a:xfrm>
-            <a:off x="502920" y="6345936"/>
-            <a:ext cx="11185855" cy="457200"/>
+            <a:off x="685800" y="5976831"/>
+            <a:ext cx="10783519" cy="195368"/>
           </a:xfrm>
           <a:prstGeom prst="rect">
             <a:avLst/>
@@ -4895,36 +8898,48 @@
           <a:p>
             <a:pPr algn="l">
               <a:lnSpc>
-                <a:spcPct val="112000"/>
+                <a:spcPct val="113000"/>
               </a:lnSpc>
             </a:pPr>
             <a:r>
-              <a:rPr sz="1200" b="0" i="1">
+              <a:rPr sz="1100" b="0" i="0">
                 <a:solidFill>
-                  <a:srgbClr val="1C7293"/>
+                  <a:srgbClr val="21295C"/>
                 </a:solidFill>
                 <a:latin typeface="Arial"/>
               </a:rPr>
-              <a:t>Ной С., Чжан У., Science 381(6654):187–192, 14.07.2023, doi:10.1126/science.adh2586 (рабочая версия MIT — 02.03.2023)</a:t>
-            </a:r>
-            <a:r>
-              <a:rPr sz="1200" b="0" i="1">
-                <a:solidFill>
-                  <a:srgbClr val="1C7293"/>
-                </a:solidFill>
-                <a:latin typeface="Arial"/>
-              </a:rPr>
-              <a:t> · </a:t>
-            </a:r>
-            <a:r>
-              <a:rPr sz="1200" b="0" i="1">
-                <a:solidFill>
-                  <a:srgbClr val="1C7293"/>
-                </a:solidFill>
-                <a:latin typeface="Arial"/>
-              </a:rPr>
-              <a:t>Цзюй Х., Арал С., «Collaborating with AI Agents», arXiv:2503.18238, MIT IDE</a:t>
-            </a:r>
+              <a:t>АДРЕС ПЛАТЕЖА   Изображение — отбор, права · Звук — права, узнавание · Видео — отбор</a:t>
+            </a:r>
+          </a:p>
+        </p:txBody>
+      </p:sp>
+      <p:sp>
+        <p:nvSpPr>
+          <p:cNvPr id="82" name="Rectangle 81"/>
+          <p:cNvSpPr/>
+          <p:nvPr/>
+        </p:nvSpPr>
+        <p:spPr>
+          <a:xfrm>
+            <a:off x="502920" y="888090"/>
+            <a:ext cx="960120" cy="50292"/>
+          </a:xfrm>
+          <a:prstGeom prst="rect">
+            <a:avLst/>
+          </a:prstGeom>
+          <a:solidFill>
+            <a:srgbClr val="F0AB00"/>
+          </a:solidFill>
+          <a:ln>
+            <a:noFill/>
+          </a:ln>
+          <a:effectLst/>
+        </p:spPr>
+        <p:txBody>
+          <a:bodyPr rtlCol="0" anchor="ctr"/>
+          <a:lstStyle/>
+          <a:p>
+            <a:pPr algn="ctr"/>
           </a:p>
         </p:txBody>
       </p:sp>
